--- a/Presentacion.pptx
+++ b/Presentacion.pptx
@@ -5,7 +5,7 @@
     <p:sldMasterId id="2147483776" r:id="rId1"/>
   </p:sldMasterIdLst>
   <p:notesMasterIdLst>
-    <p:notesMasterId r:id="rId14"/>
+    <p:notesMasterId r:id="rId16"/>
   </p:notesMasterIdLst>
   <p:sldIdLst>
     <p:sldId id="256" r:id="rId2"/>
@@ -20,6 +20,8 @@
     <p:sldId id="264" r:id="rId11"/>
     <p:sldId id="266" r:id="rId12"/>
     <p:sldId id="267" r:id="rId13"/>
+    <p:sldId id="268" r:id="rId14"/>
+    <p:sldId id="269" r:id="rId15"/>
   </p:sldIdLst>
   <p:sldSz cx="12192000" cy="6858000"/>
   <p:notesSz cx="6858000" cy="9144000"/>
@@ -208,7 +210,7 @@
           <a:p>
             <a:fld id="{DD5013F1-B25D-46EE-845B-042740B41749}" type="datetimeFigureOut">
               <a:rPr lang="es-CO" smtClean="0"/>
-              <a:t>26/06/2026</a:t>
+              <a:t>27/06/2026</a:t>
             </a:fld>
             <a:endParaRPr lang="es-CO"/>
           </a:p>
@@ -1064,6 +1066,174 @@
 </p:notes>
 </file>
 
+<file path=ppt/notesSlides/notesSlide8.xml><?xml version="1.0" encoding="utf-8"?>
+<p:notes xmlns:a="http://schemas.openxmlformats.org/drawingml/2006/main" xmlns:r="http://schemas.openxmlformats.org/officeDocument/2006/relationships" xmlns:p="http://schemas.openxmlformats.org/presentationml/2006/main">
+  <p:cSld>
+    <p:spTree>
+      <p:nvGrpSpPr>
+        <p:cNvPr id="1" name=""/>
+        <p:cNvGrpSpPr/>
+        <p:nvPr/>
+      </p:nvGrpSpPr>
+      <p:grpSpPr>
+        <a:xfrm>
+          <a:off x="0" y="0"/>
+          <a:ext cx="0" cy="0"/>
+          <a:chOff x="0" y="0"/>
+          <a:chExt cx="0" cy="0"/>
+        </a:xfrm>
+      </p:grpSpPr>
+      <p:sp>
+        <p:nvSpPr>
+          <p:cNvPr id="2" name="Marcador de imagen de diapositiva 1"/>
+          <p:cNvSpPr>
+            <a:spLocks noGrp="1" noRot="1" noChangeAspect="1"/>
+          </p:cNvSpPr>
+          <p:nvPr>
+            <p:ph type="sldImg"/>
+          </p:nvPr>
+        </p:nvSpPr>
+        <p:spPr/>
+      </p:sp>
+      <p:sp>
+        <p:nvSpPr>
+          <p:cNvPr id="3" name="Marcador de notas 2"/>
+          <p:cNvSpPr>
+            <a:spLocks noGrp="1"/>
+          </p:cNvSpPr>
+          <p:nvPr>
+            <p:ph type="body" idx="1"/>
+          </p:nvPr>
+        </p:nvSpPr>
+        <p:spPr/>
+        <p:txBody>
+          <a:bodyPr/>
+          <a:lstStyle/>
+          <a:p>
+            <a:endParaRPr lang="es-CO" dirty="0"/>
+          </a:p>
+        </p:txBody>
+      </p:sp>
+      <p:sp>
+        <p:nvSpPr>
+          <p:cNvPr id="4" name="Marcador de número de diapositiva 3"/>
+          <p:cNvSpPr>
+            <a:spLocks noGrp="1"/>
+          </p:cNvSpPr>
+          <p:nvPr>
+            <p:ph type="sldNum" sz="quarter" idx="5"/>
+          </p:nvPr>
+        </p:nvSpPr>
+        <p:spPr/>
+        <p:txBody>
+          <a:bodyPr/>
+          <a:lstStyle/>
+          <a:p>
+            <a:fld id="{1F65B897-6EAC-4752-83BC-FC4820600163}" type="slidenum">
+              <a:rPr lang="es-CO" smtClean="0"/>
+              <a:t>13</a:t>
+            </a:fld>
+            <a:endParaRPr lang="es-CO"/>
+          </a:p>
+        </p:txBody>
+      </p:sp>
+    </p:spTree>
+    <p:extLst>
+      <p:ext uri="{BB962C8B-B14F-4D97-AF65-F5344CB8AC3E}">
+        <p14:creationId xmlns:p14="http://schemas.microsoft.com/office/powerpoint/2010/main" val="4035222119"/>
+      </p:ext>
+    </p:extLst>
+  </p:cSld>
+  <p:clrMapOvr>
+    <a:masterClrMapping/>
+  </p:clrMapOvr>
+</p:notes>
+</file>
+
+<file path=ppt/notesSlides/notesSlide9.xml><?xml version="1.0" encoding="utf-8"?>
+<p:notes xmlns:a="http://schemas.openxmlformats.org/drawingml/2006/main" xmlns:r="http://schemas.openxmlformats.org/officeDocument/2006/relationships" xmlns:p="http://schemas.openxmlformats.org/presentationml/2006/main">
+  <p:cSld>
+    <p:spTree>
+      <p:nvGrpSpPr>
+        <p:cNvPr id="1" name=""/>
+        <p:cNvGrpSpPr/>
+        <p:nvPr/>
+      </p:nvGrpSpPr>
+      <p:grpSpPr>
+        <a:xfrm>
+          <a:off x="0" y="0"/>
+          <a:ext cx="0" cy="0"/>
+          <a:chOff x="0" y="0"/>
+          <a:chExt cx="0" cy="0"/>
+        </a:xfrm>
+      </p:grpSpPr>
+      <p:sp>
+        <p:nvSpPr>
+          <p:cNvPr id="2" name="Marcador de imagen de diapositiva 1"/>
+          <p:cNvSpPr>
+            <a:spLocks noGrp="1" noRot="1" noChangeAspect="1"/>
+          </p:cNvSpPr>
+          <p:nvPr>
+            <p:ph type="sldImg"/>
+          </p:nvPr>
+        </p:nvSpPr>
+        <p:spPr/>
+      </p:sp>
+      <p:sp>
+        <p:nvSpPr>
+          <p:cNvPr id="3" name="Marcador de notas 2"/>
+          <p:cNvSpPr>
+            <a:spLocks noGrp="1"/>
+          </p:cNvSpPr>
+          <p:nvPr>
+            <p:ph type="body" idx="1"/>
+          </p:nvPr>
+        </p:nvSpPr>
+        <p:spPr/>
+        <p:txBody>
+          <a:bodyPr/>
+          <a:lstStyle/>
+          <a:p>
+            <a:endParaRPr lang="es-CO" dirty="0"/>
+          </a:p>
+        </p:txBody>
+      </p:sp>
+      <p:sp>
+        <p:nvSpPr>
+          <p:cNvPr id="4" name="Marcador de número de diapositiva 3"/>
+          <p:cNvSpPr>
+            <a:spLocks noGrp="1"/>
+          </p:cNvSpPr>
+          <p:nvPr>
+            <p:ph type="sldNum" sz="quarter" idx="5"/>
+          </p:nvPr>
+        </p:nvSpPr>
+        <p:spPr/>
+        <p:txBody>
+          <a:bodyPr/>
+          <a:lstStyle/>
+          <a:p>
+            <a:fld id="{1F65B897-6EAC-4752-83BC-FC4820600163}" type="slidenum">
+              <a:rPr lang="es-CO" smtClean="0"/>
+              <a:t>14</a:t>
+            </a:fld>
+            <a:endParaRPr lang="es-CO"/>
+          </a:p>
+        </p:txBody>
+      </p:sp>
+    </p:spTree>
+    <p:extLst>
+      <p:ext uri="{BB962C8B-B14F-4D97-AF65-F5344CB8AC3E}">
+        <p14:creationId xmlns:p14="http://schemas.microsoft.com/office/powerpoint/2010/main" val="992570111"/>
+      </p:ext>
+    </p:extLst>
+  </p:cSld>
+  <p:clrMapOvr>
+    <a:masterClrMapping/>
+  </p:clrMapOvr>
+</p:notes>
+</file>
+
 <file path=ppt/slideLayouts/slideLayout1.xml><?xml version="1.0" encoding="utf-8"?>
 <p:sldLayout xmlns:a="http://schemas.openxmlformats.org/drawingml/2006/main" xmlns:r="http://schemas.openxmlformats.org/officeDocument/2006/relationships" xmlns:p="http://schemas.openxmlformats.org/presentationml/2006/main" type="title" preserve="1">
   <p:cSld name="Diapositiva de título">
@@ -1278,7 +1448,7 @@
             <a:fld id="{B61BEF0D-F0BB-DE4B-95CE-6DB70DBA9567}" type="datetimeFigureOut">
               <a:rPr lang="en-US" smtClean="0"/>
               <a:pPr/>
-              <a:t>6/26/2026</a:t>
+              <a:t>6/27/2026</a:t>
             </a:fld>
             <a:endParaRPr lang="en-US" dirty="0"/>
           </a:p>
@@ -1571,7 +1741,7 @@
             <a:fld id="{B61BEF0D-F0BB-DE4B-95CE-6DB70DBA9567}" type="datetimeFigureOut">
               <a:rPr lang="en-US" smtClean="0"/>
               <a:pPr/>
-              <a:t>6/26/2026</a:t>
+              <a:t>6/27/2026</a:t>
             </a:fld>
             <a:endParaRPr lang="en-US" dirty="0"/>
           </a:p>
@@ -1832,7 +2002,7 @@
             <a:fld id="{B61BEF0D-F0BB-DE4B-95CE-6DB70DBA9567}" type="datetimeFigureOut">
               <a:rPr lang="en-US" smtClean="0"/>
               <a:pPr/>
-              <a:t>6/26/2026</a:t>
+              <a:t>6/27/2026</a:t>
             </a:fld>
             <a:endParaRPr lang="en-US" dirty="0"/>
           </a:p>
@@ -2303,7 +2473,7 @@
             <a:fld id="{B61BEF0D-F0BB-DE4B-95CE-6DB70DBA9567}" type="datetimeFigureOut">
               <a:rPr lang="en-US" smtClean="0"/>
               <a:pPr/>
-              <a:t>6/26/2026</a:t>
+              <a:t>6/27/2026</a:t>
             </a:fld>
             <a:endParaRPr lang="en-US" dirty="0"/>
           </a:p>
@@ -2485,7 +2655,7 @@
             <a:fld id="{B61BEF0D-F0BB-DE4B-95CE-6DB70DBA9567}" type="datetimeFigureOut">
               <a:rPr lang="en-US" smtClean="0"/>
               <a:pPr/>
-              <a:t>6/26/2026</a:t>
+              <a:t>6/27/2026</a:t>
             </a:fld>
             <a:endParaRPr lang="en-US" dirty="0"/>
           </a:p>
@@ -3063,7 +3233,7 @@
             <a:fld id="{B61BEF0D-F0BB-DE4B-95CE-6DB70DBA9567}" type="datetimeFigureOut">
               <a:rPr lang="en-US" smtClean="0"/>
               <a:pPr/>
-              <a:t>6/26/2026</a:t>
+              <a:t>6/27/2026</a:t>
             </a:fld>
             <a:endParaRPr lang="en-US" dirty="0"/>
           </a:p>
@@ -3397,7 +3567,7 @@
             <a:fld id="{B61BEF0D-F0BB-DE4B-95CE-6DB70DBA9567}" type="datetimeFigureOut">
               <a:rPr lang="en-US" smtClean="0"/>
               <a:pPr/>
-              <a:t>6/26/2026</a:t>
+              <a:t>6/27/2026</a:t>
             </a:fld>
             <a:endParaRPr lang="en-US" dirty="0"/>
           </a:p>
@@ -3574,7 +3744,7 @@
             <a:fld id="{B61BEF0D-F0BB-DE4B-95CE-6DB70DBA9567}" type="datetimeFigureOut">
               <a:rPr lang="en-US" smtClean="0"/>
               <a:pPr/>
-              <a:t>6/26/2026</a:t>
+              <a:t>6/27/2026</a:t>
             </a:fld>
             <a:endParaRPr lang="en-US" dirty="0"/>
           </a:p>
@@ -3756,7 +3926,7 @@
             <a:fld id="{B61BEF0D-F0BB-DE4B-95CE-6DB70DBA9567}" type="datetimeFigureOut">
               <a:rPr lang="en-US" smtClean="0"/>
               <a:pPr/>
-              <a:t>6/26/2026</a:t>
+              <a:t>6/27/2026</a:t>
             </a:fld>
             <a:endParaRPr lang="en-US" dirty="0"/>
           </a:p>
@@ -3928,7 +4098,7 @@
             <a:fld id="{B61BEF0D-F0BB-DE4B-95CE-6DB70DBA9567}" type="datetimeFigureOut">
               <a:rPr lang="en-US" smtClean="0"/>
               <a:pPr/>
-              <a:t>6/26/2026</a:t>
+              <a:t>6/27/2026</a:t>
             </a:fld>
             <a:endParaRPr lang="en-US" dirty="0"/>
           </a:p>
@@ -4187,7 +4357,7 @@
             <a:fld id="{B61BEF0D-F0BB-DE4B-95CE-6DB70DBA9567}" type="datetimeFigureOut">
               <a:rPr lang="en-US" smtClean="0"/>
               <a:pPr/>
-              <a:t>6/26/2026</a:t>
+              <a:t>6/27/2026</a:t>
             </a:fld>
             <a:endParaRPr lang="en-US" dirty="0"/>
           </a:p>
@@ -4481,7 +4651,7 @@
             <a:fld id="{B61BEF0D-F0BB-DE4B-95CE-6DB70DBA9567}" type="datetimeFigureOut">
               <a:rPr lang="en-US" smtClean="0"/>
               <a:pPr/>
-              <a:t>6/26/2026</a:t>
+              <a:t>6/27/2026</a:t>
             </a:fld>
             <a:endParaRPr lang="en-US" dirty="0"/>
           </a:p>
@@ -4913,7 +5083,7 @@
             <a:fld id="{B61BEF0D-F0BB-DE4B-95CE-6DB70DBA9567}" type="datetimeFigureOut">
               <a:rPr lang="en-US" smtClean="0"/>
               <a:pPr/>
-              <a:t>6/26/2026</a:t>
+              <a:t>6/27/2026</a:t>
             </a:fld>
             <a:endParaRPr lang="en-US" dirty="0"/>
           </a:p>
@@ -5033,7 +5203,7 @@
             <a:fld id="{B61BEF0D-F0BB-DE4B-95CE-6DB70DBA9567}" type="datetimeFigureOut">
               <a:rPr lang="en-US" smtClean="0"/>
               <a:pPr/>
-              <a:t>6/26/2026</a:t>
+              <a:t>6/27/2026</a:t>
             </a:fld>
             <a:endParaRPr lang="en-US" dirty="0"/>
           </a:p>
@@ -5130,7 +5300,7 @@
             <a:fld id="{B61BEF0D-F0BB-DE4B-95CE-6DB70DBA9567}" type="datetimeFigureOut">
               <a:rPr lang="en-US" smtClean="0"/>
               <a:pPr/>
-              <a:t>6/26/2026</a:t>
+              <a:t>6/27/2026</a:t>
             </a:fld>
             <a:endParaRPr lang="en-US" dirty="0"/>
           </a:p>
@@ -5415,7 +5585,7 @@
             <a:fld id="{B61BEF0D-F0BB-DE4B-95CE-6DB70DBA9567}" type="datetimeFigureOut">
               <a:rPr lang="en-US" smtClean="0"/>
               <a:pPr/>
-              <a:t>6/26/2026</a:t>
+              <a:t>6/27/2026</a:t>
             </a:fld>
             <a:endParaRPr lang="en-US" dirty="0"/>
           </a:p>
@@ -5708,7 +5878,7 @@
             <a:fld id="{B61BEF0D-F0BB-DE4B-95CE-6DB70DBA9567}" type="datetimeFigureOut">
               <a:rPr lang="en-US" smtClean="0"/>
               <a:pPr/>
-              <a:t>6/26/2026</a:t>
+              <a:t>6/27/2026</a:t>
             </a:fld>
             <a:endParaRPr lang="en-US" dirty="0"/>
           </a:p>
@@ -5944,7 +6114,7 @@
             <a:fld id="{B61BEF0D-F0BB-DE4B-95CE-6DB70DBA9567}" type="datetimeFigureOut">
               <a:rPr lang="en-US" smtClean="0"/>
               <a:pPr/>
-              <a:t>6/26/2026</a:t>
+              <a:t>6/27/2026</a:t>
             </a:fld>
             <a:endParaRPr lang="en-US" dirty="0"/>
           </a:p>
@@ -12747,6 +12917,3985 @@
     <p:extLst>
       <p:ext uri="{BB962C8B-B14F-4D97-AF65-F5344CB8AC3E}">
         <p14:creationId xmlns:p14="http://schemas.microsoft.com/office/powerpoint/2010/main" val="288297794"/>
+      </p:ext>
+    </p:extLst>
+  </p:cSld>
+  <p:clrMapOvr>
+    <a:masterClrMapping/>
+  </p:clrMapOvr>
+</p:sld>
+</file>
+
+<file path=ppt/slides/slide13.xml><?xml version="1.0" encoding="utf-8"?>
+<p:sld xmlns:a="http://schemas.openxmlformats.org/drawingml/2006/main" xmlns:r="http://schemas.openxmlformats.org/officeDocument/2006/relationships" xmlns:p="http://schemas.openxmlformats.org/presentationml/2006/main">
+  <p:cSld>
+    <p:spTree>
+      <p:nvGrpSpPr>
+        <p:cNvPr id="1" name=""/>
+        <p:cNvGrpSpPr/>
+        <p:nvPr/>
+      </p:nvGrpSpPr>
+      <p:grpSpPr>
+        <a:xfrm>
+          <a:off x="0" y="0"/>
+          <a:ext cx="0" cy="0"/>
+          <a:chOff x="0" y="0"/>
+          <a:chExt cx="0" cy="0"/>
+        </a:xfrm>
+      </p:grpSpPr>
+      <p:sp>
+        <p:nvSpPr>
+          <p:cNvPr id="2" name="Título 1">
+            <a:extLst>
+              <a:ext uri="{FF2B5EF4-FFF2-40B4-BE49-F238E27FC236}">
+                <a16:creationId xmlns:a16="http://schemas.microsoft.com/office/drawing/2014/main" id="{EBF71328-1422-08C3-425F-4E2322B7A0E8}"/>
+              </a:ext>
+            </a:extLst>
+          </p:cNvPr>
+          <p:cNvSpPr>
+            <a:spLocks noGrp="1"/>
+          </p:cNvSpPr>
+          <p:nvPr>
+            <p:ph type="title"/>
+          </p:nvPr>
+        </p:nvSpPr>
+        <p:spPr>
+          <a:xfrm>
+            <a:off x="158647" y="893400"/>
+            <a:ext cx="8458051" cy="770909"/>
+          </a:xfrm>
+        </p:spPr>
+        <p:txBody>
+          <a:bodyPr>
+            <a:normAutofit fontScale="90000"/>
+          </a:bodyPr>
+          <a:lstStyle/>
+          <a:p>
+            <a:r>
+              <a:rPr lang="es-CO" b="1" dirty="0">
+                <a:effectLst/>
+              </a:rPr>
+              <a:t>La factura de la nube </a:t>
+            </a:r>
+            <a:r>
+              <a:rPr lang="es-CO" b="1" dirty="0">
+                <a:solidFill>
+                  <a:srgbClr val="C9AA4D"/>
+                </a:solidFill>
+                <a:effectLst/>
+              </a:rPr>
+              <a:t>nunca se dispara</a:t>
+            </a:r>
+            <a:endParaRPr lang="es-CO" b="1" dirty="0">
+              <a:solidFill>
+                <a:srgbClr val="C9AA4D"/>
+              </a:solidFill>
+            </a:endParaRPr>
+          </a:p>
+        </p:txBody>
+      </p:sp>
+      <p:sp>
+        <p:nvSpPr>
+          <p:cNvPr id="8" name="Título 1">
+            <a:extLst>
+              <a:ext uri="{FF2B5EF4-FFF2-40B4-BE49-F238E27FC236}">
+                <a16:creationId xmlns:a16="http://schemas.microsoft.com/office/drawing/2014/main" id="{E4AE4C90-82E4-2CD9-38DA-4C0A6E20C84E}"/>
+              </a:ext>
+            </a:extLst>
+          </p:cNvPr>
+          <p:cNvSpPr txBox="1">
+            <a:spLocks/>
+          </p:cNvSpPr>
+          <p:nvPr/>
+        </p:nvSpPr>
+        <p:spPr>
+          <a:xfrm>
+            <a:off x="158647" y="731520"/>
+            <a:ext cx="3416657" cy="405712"/>
+          </a:xfrm>
+          <a:prstGeom prst="rect">
+            <a:avLst/>
+          </a:prstGeom>
+        </p:spPr>
+        <p:txBody>
+          <a:bodyPr vert="horz" lIns="91440" tIns="45720" rIns="91440" bIns="45720" rtlCol="0" anchor="ctr">
+            <a:normAutofit/>
+          </a:bodyPr>
+          <a:lstStyle>
+            <a:lvl1pPr algn="l" defTabSz="457200" rtl="0" eaLnBrk="1" latinLnBrk="0" hangingPunct="1">
+              <a:spcBef>
+                <a:spcPct val="0"/>
+              </a:spcBef>
+              <a:buNone/>
+              <a:defRPr sz="3200" kern="1200" cap="all">
+                <a:ln w="3175" cmpd="sng">
+                  <a:noFill/>
+                </a:ln>
+                <a:gradFill flip="none" rotWithShape="1">
+                  <a:gsLst>
+                    <a:gs pos="0">
+                      <a:schemeClr val="tx1"/>
+                    </a:gs>
+                    <a:gs pos="100000">
+                      <a:schemeClr val="tx1">
+                        <a:lumMod val="65000"/>
+                      </a:schemeClr>
+                    </a:gs>
+                  </a:gsLst>
+                  <a:lin ang="5580000" scaled="0"/>
+                  <a:tileRect/>
+                </a:gradFill>
+                <a:effectLst>
+                  <a:glow rad="38100">
+                    <a:schemeClr val="bg1">
+                      <a:lumMod val="65000"/>
+                      <a:lumOff val="35000"/>
+                      <a:alpha val="40000"/>
+                    </a:schemeClr>
+                  </a:glow>
+                  <a:outerShdw blurRad="28575" dist="38100" dir="14040000" algn="tl" rotWithShape="0">
+                    <a:srgbClr val="000000">
+                      <a:alpha val="25000"/>
+                    </a:srgbClr>
+                  </a:outerShdw>
+                </a:effectLst>
+                <a:latin typeface="+mj-lt"/>
+                <a:ea typeface="+mj-ea"/>
+                <a:cs typeface="+mj-cs"/>
+              </a:defRPr>
+            </a:lvl1pPr>
+            <a:lvl2pPr eaLnBrk="1" hangingPunct="1">
+              <a:defRPr>
+                <a:solidFill>
+                  <a:schemeClr val="tx2"/>
+                </a:solidFill>
+              </a:defRPr>
+            </a:lvl2pPr>
+            <a:lvl3pPr eaLnBrk="1" hangingPunct="1">
+              <a:defRPr>
+                <a:solidFill>
+                  <a:schemeClr val="tx2"/>
+                </a:solidFill>
+              </a:defRPr>
+            </a:lvl3pPr>
+            <a:lvl4pPr eaLnBrk="1" hangingPunct="1">
+              <a:defRPr>
+                <a:solidFill>
+                  <a:schemeClr val="tx2"/>
+                </a:solidFill>
+              </a:defRPr>
+            </a:lvl4pPr>
+            <a:lvl5pPr eaLnBrk="1" hangingPunct="1">
+              <a:defRPr>
+                <a:solidFill>
+                  <a:schemeClr val="tx2"/>
+                </a:solidFill>
+              </a:defRPr>
+            </a:lvl5pPr>
+            <a:lvl6pPr eaLnBrk="1" hangingPunct="1">
+              <a:defRPr>
+                <a:solidFill>
+                  <a:schemeClr val="tx2"/>
+                </a:solidFill>
+              </a:defRPr>
+            </a:lvl6pPr>
+            <a:lvl7pPr eaLnBrk="1" hangingPunct="1">
+              <a:defRPr>
+                <a:solidFill>
+                  <a:schemeClr val="tx2"/>
+                </a:solidFill>
+              </a:defRPr>
+            </a:lvl7pPr>
+            <a:lvl8pPr eaLnBrk="1" hangingPunct="1">
+              <a:defRPr>
+                <a:solidFill>
+                  <a:schemeClr val="tx2"/>
+                </a:solidFill>
+              </a:defRPr>
+            </a:lvl8pPr>
+            <a:lvl9pPr eaLnBrk="1" hangingPunct="1">
+              <a:defRPr>
+                <a:solidFill>
+                  <a:schemeClr val="tx2"/>
+                </a:solidFill>
+              </a:defRPr>
+            </a:lvl9pPr>
+          </a:lstStyle>
+          <a:p>
+            <a:r>
+              <a:rPr lang="es-CO" sz="1400" b="1" i="0" cap="all" dirty="0">
+                <a:solidFill>
+                  <a:srgbClr val="C9A94E"/>
+                </a:solidFill>
+                <a:effectLst/>
+              </a:rPr>
+              <a:t>Sin sorpresas</a:t>
+            </a:r>
+            <a:endParaRPr lang="es-CO" sz="1400" b="1" dirty="0">
+              <a:solidFill>
+                <a:srgbClr val="C9AA4D"/>
+              </a:solidFill>
+              <a:cs typeface="Courier New" panose="02070309020205020404" pitchFamily="49" charset="0"/>
+            </a:endParaRPr>
+          </a:p>
+        </p:txBody>
+      </p:sp>
+      <p:sp>
+        <p:nvSpPr>
+          <p:cNvPr id="7" name="Marcador de contenido 2">
+            <a:extLst>
+              <a:ext uri="{FF2B5EF4-FFF2-40B4-BE49-F238E27FC236}">
+                <a16:creationId xmlns:a16="http://schemas.microsoft.com/office/drawing/2014/main" id="{5EC9AFA4-8CFC-4223-868D-574F207BBC41}"/>
+              </a:ext>
+            </a:extLst>
+          </p:cNvPr>
+          <p:cNvSpPr txBox="1">
+            <a:spLocks/>
+          </p:cNvSpPr>
+          <p:nvPr/>
+        </p:nvSpPr>
+        <p:spPr>
+          <a:xfrm>
+            <a:off x="588234" y="2832046"/>
+            <a:ext cx="10973714" cy="688395"/>
+          </a:xfrm>
+          <a:prstGeom prst="roundRect">
+            <a:avLst/>
+          </a:prstGeom>
+          <a:solidFill>
+            <a:srgbClr val="252E3C"/>
+          </a:solidFill>
+          <a:ln>
+            <a:solidFill>
+              <a:srgbClr val="343A3E"/>
+            </a:solidFill>
+          </a:ln>
+        </p:spPr>
+        <p:txBody>
+          <a:bodyPr vert="horz" lIns="91440" tIns="45720" rIns="91440" bIns="45720" rtlCol="0" anchor="ctr">
+            <a:normAutofit/>
+          </a:bodyPr>
+          <a:lstStyle>
+            <a:lvl1pPr marL="285750" indent="-285750" algn="l" defTabSz="457200" rtl="0" eaLnBrk="1" latinLnBrk="0" hangingPunct="1">
+              <a:spcBef>
+                <a:spcPct val="20000"/>
+              </a:spcBef>
+              <a:spcAft>
+                <a:spcPts val="600"/>
+              </a:spcAft>
+              <a:buClr>
+                <a:schemeClr val="tx1"/>
+              </a:buClr>
+              <a:buSzPct val="100000"/>
+              <a:buFont typeface="Arial"/>
+              <a:buChar char="•"/>
+              <a:defRPr sz="2000" kern="1200" cap="small">
+                <a:gradFill flip="none" rotWithShape="1">
+                  <a:gsLst>
+                    <a:gs pos="0">
+                      <a:schemeClr val="tx1"/>
+                    </a:gs>
+                    <a:gs pos="100000">
+                      <a:schemeClr val="tx1">
+                        <a:lumMod val="75000"/>
+                      </a:schemeClr>
+                    </a:gs>
+                  </a:gsLst>
+                  <a:lin ang="5580000" scaled="0"/>
+                  <a:tileRect/>
+                </a:gradFill>
+                <a:effectLst>
+                  <a:glow rad="38100">
+                    <a:schemeClr val="bg1">
+                      <a:lumMod val="50000"/>
+                      <a:lumOff val="50000"/>
+                      <a:alpha val="20000"/>
+                    </a:schemeClr>
+                  </a:glow>
+                  <a:outerShdw blurRad="44450" dist="12700" dir="13860000" algn="tl" rotWithShape="0">
+                    <a:srgbClr val="000000">
+                      <a:alpha val="20000"/>
+                    </a:srgbClr>
+                  </a:outerShdw>
+                </a:effectLst>
+                <a:latin typeface="+mn-lt"/>
+                <a:ea typeface="+mn-ea"/>
+                <a:cs typeface="+mn-cs"/>
+              </a:defRPr>
+            </a:lvl1pPr>
+            <a:lvl2pPr marL="742950" indent="-285750" algn="l" defTabSz="457200" rtl="0" eaLnBrk="1" latinLnBrk="0" hangingPunct="1">
+              <a:spcBef>
+                <a:spcPct val="20000"/>
+              </a:spcBef>
+              <a:spcAft>
+                <a:spcPts val="600"/>
+              </a:spcAft>
+              <a:buClr>
+                <a:schemeClr val="tx1"/>
+              </a:buClr>
+              <a:buSzPct val="100000"/>
+              <a:buFont typeface="Arial"/>
+              <a:buChar char="•"/>
+              <a:defRPr sz="1800" kern="1200" cap="small">
+                <a:gradFill flip="none" rotWithShape="1">
+                  <a:gsLst>
+                    <a:gs pos="0">
+                      <a:schemeClr val="tx1"/>
+                    </a:gs>
+                    <a:gs pos="100000">
+                      <a:schemeClr val="tx1">
+                        <a:lumMod val="75000"/>
+                      </a:schemeClr>
+                    </a:gs>
+                  </a:gsLst>
+                  <a:lin ang="5580000" scaled="0"/>
+                  <a:tileRect/>
+                </a:gradFill>
+                <a:effectLst>
+                  <a:glow rad="38100">
+                    <a:schemeClr val="bg1">
+                      <a:lumMod val="50000"/>
+                      <a:lumOff val="50000"/>
+                      <a:alpha val="20000"/>
+                    </a:schemeClr>
+                  </a:glow>
+                  <a:outerShdw blurRad="44450" dist="12700" dir="13860000" algn="tl" rotWithShape="0">
+                    <a:srgbClr val="000000">
+                      <a:alpha val="20000"/>
+                    </a:srgbClr>
+                  </a:outerShdw>
+                </a:effectLst>
+                <a:latin typeface="+mn-lt"/>
+                <a:ea typeface="+mn-ea"/>
+                <a:cs typeface="+mn-cs"/>
+              </a:defRPr>
+            </a:lvl2pPr>
+            <a:lvl3pPr marL="1200150" indent="-285750" algn="l" defTabSz="457200" rtl="0" eaLnBrk="1" latinLnBrk="0" hangingPunct="1">
+              <a:spcBef>
+                <a:spcPct val="20000"/>
+              </a:spcBef>
+              <a:spcAft>
+                <a:spcPts val="600"/>
+              </a:spcAft>
+              <a:buClr>
+                <a:schemeClr val="tx1"/>
+              </a:buClr>
+              <a:buSzPct val="100000"/>
+              <a:buFont typeface="Arial"/>
+              <a:buChar char="•"/>
+              <a:defRPr sz="1600" kern="1200" cap="small">
+                <a:gradFill flip="none" rotWithShape="1">
+                  <a:gsLst>
+                    <a:gs pos="0">
+                      <a:schemeClr val="tx1"/>
+                    </a:gs>
+                    <a:gs pos="100000">
+                      <a:schemeClr val="tx1">
+                        <a:lumMod val="75000"/>
+                      </a:schemeClr>
+                    </a:gs>
+                  </a:gsLst>
+                  <a:lin ang="5580000" scaled="0"/>
+                  <a:tileRect/>
+                </a:gradFill>
+                <a:effectLst>
+                  <a:glow rad="38100">
+                    <a:schemeClr val="bg1">
+                      <a:lumMod val="50000"/>
+                      <a:lumOff val="50000"/>
+                      <a:alpha val="20000"/>
+                    </a:schemeClr>
+                  </a:glow>
+                  <a:outerShdw blurRad="44450" dist="12700" dir="13860000" algn="tl" rotWithShape="0">
+                    <a:srgbClr val="000000">
+                      <a:alpha val="20000"/>
+                    </a:srgbClr>
+                  </a:outerShdw>
+                </a:effectLst>
+                <a:latin typeface="+mn-lt"/>
+                <a:ea typeface="+mn-ea"/>
+                <a:cs typeface="+mn-cs"/>
+              </a:defRPr>
+            </a:lvl3pPr>
+            <a:lvl4pPr marL="1543050" indent="-171450" algn="l" defTabSz="457200" rtl="0" eaLnBrk="1" latinLnBrk="0" hangingPunct="1">
+              <a:spcBef>
+                <a:spcPct val="20000"/>
+              </a:spcBef>
+              <a:spcAft>
+                <a:spcPts val="600"/>
+              </a:spcAft>
+              <a:buClr>
+                <a:schemeClr val="tx1"/>
+              </a:buClr>
+              <a:buSzPct val="100000"/>
+              <a:buFont typeface="Arial"/>
+              <a:buChar char="•"/>
+              <a:defRPr sz="1400" kern="1200" cap="small">
+                <a:gradFill flip="none" rotWithShape="1">
+                  <a:gsLst>
+                    <a:gs pos="0">
+                      <a:schemeClr val="tx1"/>
+                    </a:gs>
+                    <a:gs pos="100000">
+                      <a:schemeClr val="tx1">
+                        <a:lumMod val="75000"/>
+                      </a:schemeClr>
+                    </a:gs>
+                  </a:gsLst>
+                  <a:lin ang="5580000" scaled="0"/>
+                  <a:tileRect/>
+                </a:gradFill>
+                <a:effectLst>
+                  <a:glow rad="38100">
+                    <a:schemeClr val="bg1">
+                      <a:lumMod val="50000"/>
+                      <a:lumOff val="50000"/>
+                      <a:alpha val="20000"/>
+                    </a:schemeClr>
+                  </a:glow>
+                  <a:outerShdw blurRad="44450" dist="12700" dir="13860000" algn="tl" rotWithShape="0">
+                    <a:srgbClr val="000000">
+                      <a:alpha val="20000"/>
+                    </a:srgbClr>
+                  </a:outerShdw>
+                </a:effectLst>
+                <a:latin typeface="+mn-lt"/>
+                <a:ea typeface="+mn-ea"/>
+                <a:cs typeface="+mn-cs"/>
+              </a:defRPr>
+            </a:lvl4pPr>
+            <a:lvl5pPr marL="2000250" indent="-171450" algn="l" defTabSz="457200" rtl="0" eaLnBrk="1" latinLnBrk="0" hangingPunct="1">
+              <a:spcBef>
+                <a:spcPct val="20000"/>
+              </a:spcBef>
+              <a:spcAft>
+                <a:spcPts val="600"/>
+              </a:spcAft>
+              <a:buClr>
+                <a:schemeClr val="tx1"/>
+              </a:buClr>
+              <a:buSzPct val="100000"/>
+              <a:buFont typeface="Arial"/>
+              <a:buChar char="•"/>
+              <a:defRPr sz="1400" kern="1200" cap="small">
+                <a:gradFill flip="none" rotWithShape="1">
+                  <a:gsLst>
+                    <a:gs pos="0">
+                      <a:schemeClr val="tx1"/>
+                    </a:gs>
+                    <a:gs pos="100000">
+                      <a:schemeClr val="tx1">
+                        <a:lumMod val="75000"/>
+                      </a:schemeClr>
+                    </a:gs>
+                  </a:gsLst>
+                  <a:lin ang="5580000" scaled="0"/>
+                  <a:tileRect/>
+                </a:gradFill>
+                <a:effectLst>
+                  <a:glow rad="38100">
+                    <a:schemeClr val="bg1">
+                      <a:lumMod val="50000"/>
+                      <a:lumOff val="50000"/>
+                      <a:alpha val="20000"/>
+                    </a:schemeClr>
+                  </a:glow>
+                  <a:outerShdw blurRad="44450" dist="12700" dir="13860000" algn="tl" rotWithShape="0">
+                    <a:srgbClr val="000000">
+                      <a:alpha val="20000"/>
+                    </a:srgbClr>
+                  </a:outerShdw>
+                </a:effectLst>
+                <a:latin typeface="+mn-lt"/>
+                <a:ea typeface="+mn-ea"/>
+                <a:cs typeface="+mn-cs"/>
+              </a:defRPr>
+            </a:lvl5pPr>
+            <a:lvl6pPr marL="2514600" indent="-228600" algn="l" defTabSz="457200" rtl="0" eaLnBrk="1" latinLnBrk="0" hangingPunct="1">
+              <a:spcBef>
+                <a:spcPct val="20000"/>
+              </a:spcBef>
+              <a:spcAft>
+                <a:spcPts val="600"/>
+              </a:spcAft>
+              <a:buClr>
+                <a:schemeClr val="tx1"/>
+              </a:buClr>
+              <a:buSzPct val="100000"/>
+              <a:buFont typeface="Arial"/>
+              <a:buChar char="•"/>
+              <a:defRPr sz="1200" kern="1200" cap="small">
+                <a:gradFill flip="none" rotWithShape="1">
+                  <a:gsLst>
+                    <a:gs pos="0">
+                      <a:schemeClr val="tx1"/>
+                    </a:gs>
+                    <a:gs pos="100000">
+                      <a:schemeClr val="tx1">
+                        <a:lumMod val="75000"/>
+                      </a:schemeClr>
+                    </a:gs>
+                  </a:gsLst>
+                  <a:lin ang="5580000" scaled="0"/>
+                  <a:tileRect/>
+                </a:gradFill>
+                <a:effectLst>
+                  <a:glow rad="38100">
+                    <a:schemeClr val="bg1">
+                      <a:lumMod val="50000"/>
+                      <a:lumOff val="50000"/>
+                      <a:alpha val="20000"/>
+                    </a:schemeClr>
+                  </a:glow>
+                  <a:outerShdw blurRad="44450" dist="12700" dir="13860000" algn="tl" rotWithShape="0">
+                    <a:srgbClr val="000000">
+                      <a:alpha val="20000"/>
+                    </a:srgbClr>
+                  </a:outerShdw>
+                </a:effectLst>
+                <a:latin typeface="+mn-lt"/>
+                <a:ea typeface="+mn-ea"/>
+                <a:cs typeface="+mn-cs"/>
+              </a:defRPr>
+            </a:lvl6pPr>
+            <a:lvl7pPr marL="2971800" indent="-228600" algn="l" defTabSz="457200" rtl="0" eaLnBrk="1" latinLnBrk="0" hangingPunct="1">
+              <a:spcBef>
+                <a:spcPct val="20000"/>
+              </a:spcBef>
+              <a:spcAft>
+                <a:spcPts val="600"/>
+              </a:spcAft>
+              <a:buClr>
+                <a:schemeClr val="tx1"/>
+              </a:buClr>
+              <a:buSzPct val="100000"/>
+              <a:buFont typeface="Arial"/>
+              <a:buChar char="•"/>
+              <a:defRPr sz="1200" kern="1200" cap="small">
+                <a:gradFill flip="none" rotWithShape="1">
+                  <a:gsLst>
+                    <a:gs pos="0">
+                      <a:schemeClr val="tx1"/>
+                    </a:gs>
+                    <a:gs pos="100000">
+                      <a:schemeClr val="tx1">
+                        <a:lumMod val="75000"/>
+                      </a:schemeClr>
+                    </a:gs>
+                  </a:gsLst>
+                  <a:lin ang="5580000" scaled="0"/>
+                  <a:tileRect/>
+                </a:gradFill>
+                <a:effectLst>
+                  <a:glow rad="38100">
+                    <a:schemeClr val="bg1">
+                      <a:lumMod val="50000"/>
+                      <a:lumOff val="50000"/>
+                      <a:alpha val="20000"/>
+                    </a:schemeClr>
+                  </a:glow>
+                  <a:outerShdw blurRad="44450" dist="12700" dir="13860000" algn="tl" rotWithShape="0">
+                    <a:srgbClr val="000000">
+                      <a:alpha val="20000"/>
+                    </a:srgbClr>
+                  </a:outerShdw>
+                </a:effectLst>
+                <a:latin typeface="+mn-lt"/>
+                <a:ea typeface="+mn-ea"/>
+                <a:cs typeface="+mn-cs"/>
+              </a:defRPr>
+            </a:lvl7pPr>
+            <a:lvl8pPr marL="3429000" indent="-228600" algn="l" defTabSz="457200" rtl="0" eaLnBrk="1" latinLnBrk="0" hangingPunct="1">
+              <a:spcBef>
+                <a:spcPct val="20000"/>
+              </a:spcBef>
+              <a:spcAft>
+                <a:spcPts val="600"/>
+              </a:spcAft>
+              <a:buClr>
+                <a:schemeClr val="tx1"/>
+              </a:buClr>
+              <a:buSzPct val="100000"/>
+              <a:buFont typeface="Arial"/>
+              <a:buChar char="•"/>
+              <a:defRPr sz="1200" kern="1200" cap="small">
+                <a:gradFill flip="none" rotWithShape="1">
+                  <a:gsLst>
+                    <a:gs pos="0">
+                      <a:schemeClr val="tx1"/>
+                    </a:gs>
+                    <a:gs pos="100000">
+                      <a:schemeClr val="tx1">
+                        <a:lumMod val="75000"/>
+                      </a:schemeClr>
+                    </a:gs>
+                  </a:gsLst>
+                  <a:lin ang="5580000" scaled="0"/>
+                  <a:tileRect/>
+                </a:gradFill>
+                <a:effectLst>
+                  <a:glow rad="38100">
+                    <a:schemeClr val="bg1">
+                      <a:lumMod val="50000"/>
+                      <a:lumOff val="50000"/>
+                      <a:alpha val="20000"/>
+                    </a:schemeClr>
+                  </a:glow>
+                  <a:outerShdw blurRad="44450" dist="12700" dir="13860000" algn="tl" rotWithShape="0">
+                    <a:srgbClr val="000000">
+                      <a:alpha val="20000"/>
+                    </a:srgbClr>
+                  </a:outerShdw>
+                </a:effectLst>
+                <a:latin typeface="+mn-lt"/>
+                <a:ea typeface="+mn-ea"/>
+                <a:cs typeface="+mn-cs"/>
+              </a:defRPr>
+            </a:lvl8pPr>
+            <a:lvl9pPr marL="3886200" indent="-228600" algn="l" defTabSz="457200" rtl="0" eaLnBrk="1" latinLnBrk="0" hangingPunct="1">
+              <a:spcBef>
+                <a:spcPct val="20000"/>
+              </a:spcBef>
+              <a:spcAft>
+                <a:spcPts val="600"/>
+              </a:spcAft>
+              <a:buClr>
+                <a:schemeClr val="tx1"/>
+              </a:buClr>
+              <a:buSzPct val="100000"/>
+              <a:buFont typeface="Arial"/>
+              <a:buChar char="•"/>
+              <a:defRPr sz="1200" kern="1200" cap="small">
+                <a:gradFill flip="none" rotWithShape="1">
+                  <a:gsLst>
+                    <a:gs pos="0">
+                      <a:schemeClr val="tx1"/>
+                    </a:gs>
+                    <a:gs pos="100000">
+                      <a:schemeClr val="tx1">
+                        <a:lumMod val="75000"/>
+                      </a:schemeClr>
+                    </a:gs>
+                  </a:gsLst>
+                  <a:lin ang="5580000" scaled="0"/>
+                  <a:tileRect/>
+                </a:gradFill>
+                <a:effectLst>
+                  <a:glow rad="38100">
+                    <a:schemeClr val="bg1">
+                      <a:lumMod val="50000"/>
+                      <a:lumOff val="50000"/>
+                      <a:alpha val="20000"/>
+                    </a:schemeClr>
+                  </a:glow>
+                  <a:outerShdw blurRad="44450" dist="12700" dir="13860000" algn="tl" rotWithShape="0">
+                    <a:srgbClr val="000000">
+                      <a:alpha val="20000"/>
+                    </a:srgbClr>
+                  </a:outerShdw>
+                </a:effectLst>
+                <a:latin typeface="+mn-lt"/>
+                <a:ea typeface="+mn-ea"/>
+                <a:cs typeface="+mn-cs"/>
+              </a:defRPr>
+            </a:lvl9pPr>
+          </a:lstStyle>
+          <a:p>
+            <a:pPr marL="0" indent="0">
+              <a:buFont typeface="Arial"/>
+              <a:buNone/>
+            </a:pPr>
+            <a:r>
+              <a:rPr lang="es-CO" sz="1400" b="1" cap="all" dirty="0">
+                <a:solidFill>
+                  <a:srgbClr val="C9AA4D"/>
+                </a:solidFill>
+                <a:effectLst/>
+              </a:rPr>
+              <a:t>Topes de gasto automáticos</a:t>
+            </a:r>
+          </a:p>
+          <a:p>
+            <a:pPr marL="0" indent="0">
+              <a:buFont typeface="Arial"/>
+              <a:buNone/>
+            </a:pPr>
+            <a:r>
+              <a:rPr lang="es-MX" sz="1300" cap="none" dirty="0">
+                <a:solidFill>
+                  <a:srgbClr val="ACA9A7"/>
+                </a:solidFill>
+                <a:effectLst/>
+              </a:rPr>
+              <a:t>Límites configurados en cada servicio. Si se alcanza el tope, el sistema avisa inmediatamente.</a:t>
+            </a:r>
+            <a:endParaRPr lang="es-CO" sz="1300" cap="all" dirty="0">
+              <a:solidFill>
+                <a:srgbClr val="ACA9A7"/>
+              </a:solidFill>
+              <a:effectLst/>
+            </a:endParaRPr>
+          </a:p>
+        </p:txBody>
+      </p:sp>
+      <p:grpSp>
+        <p:nvGrpSpPr>
+          <p:cNvPr id="12" name="Grupo 11">
+            <a:extLst>
+              <a:ext uri="{FF2B5EF4-FFF2-40B4-BE49-F238E27FC236}">
+                <a16:creationId xmlns:a16="http://schemas.microsoft.com/office/drawing/2014/main" id="{97FA7569-F799-3FC2-C021-D9F9E48D707B}"/>
+              </a:ext>
+            </a:extLst>
+          </p:cNvPr>
+          <p:cNvGrpSpPr/>
+          <p:nvPr/>
+        </p:nvGrpSpPr>
+        <p:grpSpPr>
+          <a:xfrm>
+            <a:off x="609142" y="1664309"/>
+            <a:ext cx="10973715" cy="871291"/>
+            <a:chOff x="392277" y="1743893"/>
+            <a:chExt cx="10973715" cy="871291"/>
+          </a:xfrm>
+        </p:grpSpPr>
+        <p:sp>
+          <p:nvSpPr>
+            <p:cNvPr id="5" name="Marcador de contenido 2">
+              <a:extLst>
+                <a:ext uri="{FF2B5EF4-FFF2-40B4-BE49-F238E27FC236}">
+                  <a16:creationId xmlns:a16="http://schemas.microsoft.com/office/drawing/2014/main" id="{9ACD9CFE-0E00-169E-EC65-71B6C11D7A1E}"/>
+                </a:ext>
+              </a:extLst>
+            </p:cNvPr>
+            <p:cNvSpPr txBox="1">
+              <a:spLocks/>
+            </p:cNvSpPr>
+            <p:nvPr/>
+          </p:nvSpPr>
+          <p:spPr>
+            <a:xfrm>
+              <a:off x="392277" y="1743893"/>
+              <a:ext cx="10973715" cy="871291"/>
+            </a:xfrm>
+            <a:prstGeom prst="roundRect">
+              <a:avLst>
+                <a:gd name="adj" fmla="val 4035"/>
+              </a:avLst>
+            </a:prstGeom>
+            <a:solidFill>
+              <a:srgbClr val="252E3C">
+                <a:alpha val="50000"/>
+              </a:srgbClr>
+            </a:solidFill>
+            <a:ln>
+              <a:solidFill>
+                <a:srgbClr val="343A3E"/>
+              </a:solidFill>
+            </a:ln>
+          </p:spPr>
+          <p:txBody>
+            <a:bodyPr vert="horz" lIns="91440" tIns="45720" rIns="91440" bIns="45720" rtlCol="0" anchor="ctr">
+              <a:normAutofit/>
+            </a:bodyPr>
+            <a:lstStyle>
+              <a:lvl1pPr marL="285750" indent="-285750" algn="l" defTabSz="457200" rtl="0" eaLnBrk="1" latinLnBrk="0" hangingPunct="1">
+                <a:spcBef>
+                  <a:spcPct val="20000"/>
+                </a:spcBef>
+                <a:spcAft>
+                  <a:spcPts val="600"/>
+                </a:spcAft>
+                <a:buClr>
+                  <a:schemeClr val="tx1"/>
+                </a:buClr>
+                <a:buSzPct val="100000"/>
+                <a:buFont typeface="Arial"/>
+                <a:buChar char="•"/>
+                <a:defRPr sz="2000" kern="1200" cap="small">
+                  <a:gradFill flip="none" rotWithShape="1">
+                    <a:gsLst>
+                      <a:gs pos="0">
+                        <a:schemeClr val="tx1"/>
+                      </a:gs>
+                      <a:gs pos="100000">
+                        <a:schemeClr val="tx1">
+                          <a:lumMod val="75000"/>
+                        </a:schemeClr>
+                      </a:gs>
+                    </a:gsLst>
+                    <a:lin ang="5580000" scaled="0"/>
+                    <a:tileRect/>
+                  </a:gradFill>
+                  <a:effectLst>
+                    <a:glow rad="38100">
+                      <a:schemeClr val="bg1">
+                        <a:lumMod val="50000"/>
+                        <a:lumOff val="50000"/>
+                        <a:alpha val="20000"/>
+                      </a:schemeClr>
+                    </a:glow>
+                    <a:outerShdw blurRad="44450" dist="12700" dir="13860000" algn="tl" rotWithShape="0">
+                      <a:srgbClr val="000000">
+                        <a:alpha val="20000"/>
+                      </a:srgbClr>
+                    </a:outerShdw>
+                  </a:effectLst>
+                  <a:latin typeface="+mn-lt"/>
+                  <a:ea typeface="+mn-ea"/>
+                  <a:cs typeface="+mn-cs"/>
+                </a:defRPr>
+              </a:lvl1pPr>
+              <a:lvl2pPr marL="742950" indent="-285750" algn="l" defTabSz="457200" rtl="0" eaLnBrk="1" latinLnBrk="0" hangingPunct="1">
+                <a:spcBef>
+                  <a:spcPct val="20000"/>
+                </a:spcBef>
+                <a:spcAft>
+                  <a:spcPts val="600"/>
+                </a:spcAft>
+                <a:buClr>
+                  <a:schemeClr val="tx1"/>
+                </a:buClr>
+                <a:buSzPct val="100000"/>
+                <a:buFont typeface="Arial"/>
+                <a:buChar char="•"/>
+                <a:defRPr sz="1800" kern="1200" cap="small">
+                  <a:gradFill flip="none" rotWithShape="1">
+                    <a:gsLst>
+                      <a:gs pos="0">
+                        <a:schemeClr val="tx1"/>
+                      </a:gs>
+                      <a:gs pos="100000">
+                        <a:schemeClr val="tx1">
+                          <a:lumMod val="75000"/>
+                        </a:schemeClr>
+                      </a:gs>
+                    </a:gsLst>
+                    <a:lin ang="5580000" scaled="0"/>
+                    <a:tileRect/>
+                  </a:gradFill>
+                  <a:effectLst>
+                    <a:glow rad="38100">
+                      <a:schemeClr val="bg1">
+                        <a:lumMod val="50000"/>
+                        <a:lumOff val="50000"/>
+                        <a:alpha val="20000"/>
+                      </a:schemeClr>
+                    </a:glow>
+                    <a:outerShdw blurRad="44450" dist="12700" dir="13860000" algn="tl" rotWithShape="0">
+                      <a:srgbClr val="000000">
+                        <a:alpha val="20000"/>
+                      </a:srgbClr>
+                    </a:outerShdw>
+                  </a:effectLst>
+                  <a:latin typeface="+mn-lt"/>
+                  <a:ea typeface="+mn-ea"/>
+                  <a:cs typeface="+mn-cs"/>
+                </a:defRPr>
+              </a:lvl2pPr>
+              <a:lvl3pPr marL="1200150" indent="-285750" algn="l" defTabSz="457200" rtl="0" eaLnBrk="1" latinLnBrk="0" hangingPunct="1">
+                <a:spcBef>
+                  <a:spcPct val="20000"/>
+                </a:spcBef>
+                <a:spcAft>
+                  <a:spcPts val="600"/>
+                </a:spcAft>
+                <a:buClr>
+                  <a:schemeClr val="tx1"/>
+                </a:buClr>
+                <a:buSzPct val="100000"/>
+                <a:buFont typeface="Arial"/>
+                <a:buChar char="•"/>
+                <a:defRPr sz="1600" kern="1200" cap="small">
+                  <a:gradFill flip="none" rotWithShape="1">
+                    <a:gsLst>
+                      <a:gs pos="0">
+                        <a:schemeClr val="tx1"/>
+                      </a:gs>
+                      <a:gs pos="100000">
+                        <a:schemeClr val="tx1">
+                          <a:lumMod val="75000"/>
+                        </a:schemeClr>
+                      </a:gs>
+                    </a:gsLst>
+                    <a:lin ang="5580000" scaled="0"/>
+                    <a:tileRect/>
+                  </a:gradFill>
+                  <a:effectLst>
+                    <a:glow rad="38100">
+                      <a:schemeClr val="bg1">
+                        <a:lumMod val="50000"/>
+                        <a:lumOff val="50000"/>
+                        <a:alpha val="20000"/>
+                      </a:schemeClr>
+                    </a:glow>
+                    <a:outerShdw blurRad="44450" dist="12700" dir="13860000" algn="tl" rotWithShape="0">
+                      <a:srgbClr val="000000">
+                        <a:alpha val="20000"/>
+                      </a:srgbClr>
+                    </a:outerShdw>
+                  </a:effectLst>
+                  <a:latin typeface="+mn-lt"/>
+                  <a:ea typeface="+mn-ea"/>
+                  <a:cs typeface="+mn-cs"/>
+                </a:defRPr>
+              </a:lvl3pPr>
+              <a:lvl4pPr marL="1543050" indent="-171450" algn="l" defTabSz="457200" rtl="0" eaLnBrk="1" latinLnBrk="0" hangingPunct="1">
+                <a:spcBef>
+                  <a:spcPct val="20000"/>
+                </a:spcBef>
+                <a:spcAft>
+                  <a:spcPts val="600"/>
+                </a:spcAft>
+                <a:buClr>
+                  <a:schemeClr val="tx1"/>
+                </a:buClr>
+                <a:buSzPct val="100000"/>
+                <a:buFont typeface="Arial"/>
+                <a:buChar char="•"/>
+                <a:defRPr sz="1400" kern="1200" cap="small">
+                  <a:gradFill flip="none" rotWithShape="1">
+                    <a:gsLst>
+                      <a:gs pos="0">
+                        <a:schemeClr val="tx1"/>
+                      </a:gs>
+                      <a:gs pos="100000">
+                        <a:schemeClr val="tx1">
+                          <a:lumMod val="75000"/>
+                        </a:schemeClr>
+                      </a:gs>
+                    </a:gsLst>
+                    <a:lin ang="5580000" scaled="0"/>
+                    <a:tileRect/>
+                  </a:gradFill>
+                  <a:effectLst>
+                    <a:glow rad="38100">
+                      <a:schemeClr val="bg1">
+                        <a:lumMod val="50000"/>
+                        <a:lumOff val="50000"/>
+                        <a:alpha val="20000"/>
+                      </a:schemeClr>
+                    </a:glow>
+                    <a:outerShdw blurRad="44450" dist="12700" dir="13860000" algn="tl" rotWithShape="0">
+                      <a:srgbClr val="000000">
+                        <a:alpha val="20000"/>
+                      </a:srgbClr>
+                    </a:outerShdw>
+                  </a:effectLst>
+                  <a:latin typeface="+mn-lt"/>
+                  <a:ea typeface="+mn-ea"/>
+                  <a:cs typeface="+mn-cs"/>
+                </a:defRPr>
+              </a:lvl4pPr>
+              <a:lvl5pPr marL="2000250" indent="-171450" algn="l" defTabSz="457200" rtl="0" eaLnBrk="1" latinLnBrk="0" hangingPunct="1">
+                <a:spcBef>
+                  <a:spcPct val="20000"/>
+                </a:spcBef>
+                <a:spcAft>
+                  <a:spcPts val="600"/>
+                </a:spcAft>
+                <a:buClr>
+                  <a:schemeClr val="tx1"/>
+                </a:buClr>
+                <a:buSzPct val="100000"/>
+                <a:buFont typeface="Arial"/>
+                <a:buChar char="•"/>
+                <a:defRPr sz="1400" kern="1200" cap="small">
+                  <a:gradFill flip="none" rotWithShape="1">
+                    <a:gsLst>
+                      <a:gs pos="0">
+                        <a:schemeClr val="tx1"/>
+                      </a:gs>
+                      <a:gs pos="100000">
+                        <a:schemeClr val="tx1">
+                          <a:lumMod val="75000"/>
+                        </a:schemeClr>
+                      </a:gs>
+                    </a:gsLst>
+                    <a:lin ang="5580000" scaled="0"/>
+                    <a:tileRect/>
+                  </a:gradFill>
+                  <a:effectLst>
+                    <a:glow rad="38100">
+                      <a:schemeClr val="bg1">
+                        <a:lumMod val="50000"/>
+                        <a:lumOff val="50000"/>
+                        <a:alpha val="20000"/>
+                      </a:schemeClr>
+                    </a:glow>
+                    <a:outerShdw blurRad="44450" dist="12700" dir="13860000" algn="tl" rotWithShape="0">
+                      <a:srgbClr val="000000">
+                        <a:alpha val="20000"/>
+                      </a:srgbClr>
+                    </a:outerShdw>
+                  </a:effectLst>
+                  <a:latin typeface="+mn-lt"/>
+                  <a:ea typeface="+mn-ea"/>
+                  <a:cs typeface="+mn-cs"/>
+                </a:defRPr>
+              </a:lvl5pPr>
+              <a:lvl6pPr marL="2514600" indent="-228600" algn="l" defTabSz="457200" rtl="0" eaLnBrk="1" latinLnBrk="0" hangingPunct="1">
+                <a:spcBef>
+                  <a:spcPct val="20000"/>
+                </a:spcBef>
+                <a:spcAft>
+                  <a:spcPts val="600"/>
+                </a:spcAft>
+                <a:buClr>
+                  <a:schemeClr val="tx1"/>
+                </a:buClr>
+                <a:buSzPct val="100000"/>
+                <a:buFont typeface="Arial"/>
+                <a:buChar char="•"/>
+                <a:defRPr sz="1200" kern="1200" cap="small">
+                  <a:gradFill flip="none" rotWithShape="1">
+                    <a:gsLst>
+                      <a:gs pos="0">
+                        <a:schemeClr val="tx1"/>
+                      </a:gs>
+                      <a:gs pos="100000">
+                        <a:schemeClr val="tx1">
+                          <a:lumMod val="75000"/>
+                        </a:schemeClr>
+                      </a:gs>
+                    </a:gsLst>
+                    <a:lin ang="5580000" scaled="0"/>
+                    <a:tileRect/>
+                  </a:gradFill>
+                  <a:effectLst>
+                    <a:glow rad="38100">
+                      <a:schemeClr val="bg1">
+                        <a:lumMod val="50000"/>
+                        <a:lumOff val="50000"/>
+                        <a:alpha val="20000"/>
+                      </a:schemeClr>
+                    </a:glow>
+                    <a:outerShdw blurRad="44450" dist="12700" dir="13860000" algn="tl" rotWithShape="0">
+                      <a:srgbClr val="000000">
+                        <a:alpha val="20000"/>
+                      </a:srgbClr>
+                    </a:outerShdw>
+                  </a:effectLst>
+                  <a:latin typeface="+mn-lt"/>
+                  <a:ea typeface="+mn-ea"/>
+                  <a:cs typeface="+mn-cs"/>
+                </a:defRPr>
+              </a:lvl6pPr>
+              <a:lvl7pPr marL="2971800" indent="-228600" algn="l" defTabSz="457200" rtl="0" eaLnBrk="1" latinLnBrk="0" hangingPunct="1">
+                <a:spcBef>
+                  <a:spcPct val="20000"/>
+                </a:spcBef>
+                <a:spcAft>
+                  <a:spcPts val="600"/>
+                </a:spcAft>
+                <a:buClr>
+                  <a:schemeClr val="tx1"/>
+                </a:buClr>
+                <a:buSzPct val="100000"/>
+                <a:buFont typeface="Arial"/>
+                <a:buChar char="•"/>
+                <a:defRPr sz="1200" kern="1200" cap="small">
+                  <a:gradFill flip="none" rotWithShape="1">
+                    <a:gsLst>
+                      <a:gs pos="0">
+                        <a:schemeClr val="tx1"/>
+                      </a:gs>
+                      <a:gs pos="100000">
+                        <a:schemeClr val="tx1">
+                          <a:lumMod val="75000"/>
+                        </a:schemeClr>
+                      </a:gs>
+                    </a:gsLst>
+                    <a:lin ang="5580000" scaled="0"/>
+                    <a:tileRect/>
+                  </a:gradFill>
+                  <a:effectLst>
+                    <a:glow rad="38100">
+                      <a:schemeClr val="bg1">
+                        <a:lumMod val="50000"/>
+                        <a:lumOff val="50000"/>
+                        <a:alpha val="20000"/>
+                      </a:schemeClr>
+                    </a:glow>
+                    <a:outerShdw blurRad="44450" dist="12700" dir="13860000" algn="tl" rotWithShape="0">
+                      <a:srgbClr val="000000">
+                        <a:alpha val="20000"/>
+                      </a:srgbClr>
+                    </a:outerShdw>
+                  </a:effectLst>
+                  <a:latin typeface="+mn-lt"/>
+                  <a:ea typeface="+mn-ea"/>
+                  <a:cs typeface="+mn-cs"/>
+                </a:defRPr>
+              </a:lvl7pPr>
+              <a:lvl8pPr marL="3429000" indent="-228600" algn="l" defTabSz="457200" rtl="0" eaLnBrk="1" latinLnBrk="0" hangingPunct="1">
+                <a:spcBef>
+                  <a:spcPct val="20000"/>
+                </a:spcBef>
+                <a:spcAft>
+                  <a:spcPts val="600"/>
+                </a:spcAft>
+                <a:buClr>
+                  <a:schemeClr val="tx1"/>
+                </a:buClr>
+                <a:buSzPct val="100000"/>
+                <a:buFont typeface="Arial"/>
+                <a:buChar char="•"/>
+                <a:defRPr sz="1200" kern="1200" cap="small">
+                  <a:gradFill flip="none" rotWithShape="1">
+                    <a:gsLst>
+                      <a:gs pos="0">
+                        <a:schemeClr val="tx1"/>
+                      </a:gs>
+                      <a:gs pos="100000">
+                        <a:schemeClr val="tx1">
+                          <a:lumMod val="75000"/>
+                        </a:schemeClr>
+                      </a:gs>
+                    </a:gsLst>
+                    <a:lin ang="5580000" scaled="0"/>
+                    <a:tileRect/>
+                  </a:gradFill>
+                  <a:effectLst>
+                    <a:glow rad="38100">
+                      <a:schemeClr val="bg1">
+                        <a:lumMod val="50000"/>
+                        <a:lumOff val="50000"/>
+                        <a:alpha val="20000"/>
+                      </a:schemeClr>
+                    </a:glow>
+                    <a:outerShdw blurRad="44450" dist="12700" dir="13860000" algn="tl" rotWithShape="0">
+                      <a:srgbClr val="000000">
+                        <a:alpha val="20000"/>
+                      </a:srgbClr>
+                    </a:outerShdw>
+                  </a:effectLst>
+                  <a:latin typeface="+mn-lt"/>
+                  <a:ea typeface="+mn-ea"/>
+                  <a:cs typeface="+mn-cs"/>
+                </a:defRPr>
+              </a:lvl8pPr>
+              <a:lvl9pPr marL="3886200" indent="-228600" algn="l" defTabSz="457200" rtl="0" eaLnBrk="1" latinLnBrk="0" hangingPunct="1">
+                <a:spcBef>
+                  <a:spcPct val="20000"/>
+                </a:spcBef>
+                <a:spcAft>
+                  <a:spcPts val="600"/>
+                </a:spcAft>
+                <a:buClr>
+                  <a:schemeClr val="tx1"/>
+                </a:buClr>
+                <a:buSzPct val="100000"/>
+                <a:buFont typeface="Arial"/>
+                <a:buChar char="•"/>
+                <a:defRPr sz="1200" kern="1200" cap="small">
+                  <a:gradFill flip="none" rotWithShape="1">
+                    <a:gsLst>
+                      <a:gs pos="0">
+                        <a:schemeClr val="tx1"/>
+                      </a:gs>
+                      <a:gs pos="100000">
+                        <a:schemeClr val="tx1">
+                          <a:lumMod val="75000"/>
+                        </a:schemeClr>
+                      </a:gs>
+                    </a:gsLst>
+                    <a:lin ang="5580000" scaled="0"/>
+                    <a:tileRect/>
+                  </a:gradFill>
+                  <a:effectLst>
+                    <a:glow rad="38100">
+                      <a:schemeClr val="bg1">
+                        <a:lumMod val="50000"/>
+                        <a:lumOff val="50000"/>
+                        <a:alpha val="20000"/>
+                      </a:schemeClr>
+                    </a:glow>
+                    <a:outerShdw blurRad="44450" dist="12700" dir="13860000" algn="tl" rotWithShape="0">
+                      <a:srgbClr val="000000">
+                        <a:alpha val="20000"/>
+                      </a:srgbClr>
+                    </a:outerShdw>
+                  </a:effectLst>
+                  <a:latin typeface="+mn-lt"/>
+                  <a:ea typeface="+mn-ea"/>
+                  <a:cs typeface="+mn-cs"/>
+                </a:defRPr>
+              </a:lvl9pPr>
+            </a:lstStyle>
+            <a:p>
+              <a:pPr marL="0" indent="0" algn="ctr">
+                <a:buFont typeface="Arial"/>
+                <a:buNone/>
+              </a:pPr>
+              <a:endParaRPr lang="es-CO" sz="3600" b="1" cap="none" dirty="0">
+                <a:solidFill>
+                  <a:srgbClr val="6D7366"/>
+                </a:solidFill>
+                <a:effectLst/>
+              </a:endParaRPr>
+            </a:p>
+          </p:txBody>
+        </p:sp>
+        <p:pic>
+          <p:nvPicPr>
+            <p:cNvPr id="1026" name="Picture 2">
+              <a:extLst>
+                <a:ext uri="{FF2B5EF4-FFF2-40B4-BE49-F238E27FC236}">
+                  <a16:creationId xmlns:a16="http://schemas.microsoft.com/office/drawing/2014/main" id="{B61A28C3-3C82-D61C-005C-B020816AF2DD}"/>
+                </a:ext>
+              </a:extLst>
+            </p:cNvPr>
+            <p:cNvPicPr>
+              <a:picLocks noChangeAspect="1" noChangeArrowheads="1"/>
+            </p:cNvPicPr>
+            <p:nvPr/>
+          </p:nvPicPr>
+          <p:blipFill>
+            <a:blip r:embed="rId3">
+              <a:extLst>
+                <a:ext uri="{28A0092B-C50C-407E-A947-70E740481C1C}">
+                  <a14:useLocalDpi xmlns:a14="http://schemas.microsoft.com/office/drawing/2010/main" val="0"/>
+                </a:ext>
+              </a:extLst>
+            </a:blip>
+            <a:srcRect/>
+            <a:stretch>
+              <a:fillRect/>
+            </a:stretch>
+          </p:blipFill>
+          <p:spPr bwMode="auto">
+            <a:xfrm>
+              <a:off x="441073" y="1890934"/>
+              <a:ext cx="10840403" cy="615432"/>
+            </a:xfrm>
+            <a:prstGeom prst="rect">
+              <a:avLst/>
+            </a:prstGeom>
+            <a:noFill/>
+            <a:extLst>
+              <a:ext uri="{909E8E84-426E-40DD-AFC4-6F175D3DCCD1}">
+                <a14:hiddenFill xmlns:a14="http://schemas.microsoft.com/office/drawing/2010/main">
+                  <a:solidFill>
+                    <a:srgbClr val="FFFFFF"/>
+                  </a:solidFill>
+                </a14:hiddenFill>
+              </a:ext>
+            </a:extLst>
+          </p:spPr>
+        </p:pic>
+      </p:grpSp>
+      <p:sp>
+        <p:nvSpPr>
+          <p:cNvPr id="13" name="Marcador de contenido 2">
+            <a:extLst>
+              <a:ext uri="{FF2B5EF4-FFF2-40B4-BE49-F238E27FC236}">
+                <a16:creationId xmlns:a16="http://schemas.microsoft.com/office/drawing/2014/main" id="{68F04F2B-D50E-E82C-3F4B-948B7DFEDE51}"/>
+              </a:ext>
+            </a:extLst>
+          </p:cNvPr>
+          <p:cNvSpPr txBox="1">
+            <a:spLocks/>
+          </p:cNvSpPr>
+          <p:nvPr/>
+        </p:nvSpPr>
+        <p:spPr>
+          <a:xfrm>
+            <a:off x="609142" y="3721062"/>
+            <a:ext cx="10973714" cy="688395"/>
+          </a:xfrm>
+          <a:prstGeom prst="roundRect">
+            <a:avLst/>
+          </a:prstGeom>
+          <a:solidFill>
+            <a:srgbClr val="252E3C"/>
+          </a:solidFill>
+          <a:ln>
+            <a:solidFill>
+              <a:srgbClr val="343A3E"/>
+            </a:solidFill>
+          </a:ln>
+        </p:spPr>
+        <p:txBody>
+          <a:bodyPr vert="horz" lIns="91440" tIns="45720" rIns="91440" bIns="45720" rtlCol="0" anchor="ctr">
+            <a:normAutofit/>
+          </a:bodyPr>
+          <a:lstStyle>
+            <a:lvl1pPr marL="285750" indent="-285750" algn="l" defTabSz="457200" rtl="0" eaLnBrk="1" latinLnBrk="0" hangingPunct="1">
+              <a:spcBef>
+                <a:spcPct val="20000"/>
+              </a:spcBef>
+              <a:spcAft>
+                <a:spcPts val="600"/>
+              </a:spcAft>
+              <a:buClr>
+                <a:schemeClr val="tx1"/>
+              </a:buClr>
+              <a:buSzPct val="100000"/>
+              <a:buFont typeface="Arial"/>
+              <a:buChar char="•"/>
+              <a:defRPr sz="2000" kern="1200" cap="small">
+                <a:gradFill flip="none" rotWithShape="1">
+                  <a:gsLst>
+                    <a:gs pos="0">
+                      <a:schemeClr val="tx1"/>
+                    </a:gs>
+                    <a:gs pos="100000">
+                      <a:schemeClr val="tx1">
+                        <a:lumMod val="75000"/>
+                      </a:schemeClr>
+                    </a:gs>
+                  </a:gsLst>
+                  <a:lin ang="5580000" scaled="0"/>
+                  <a:tileRect/>
+                </a:gradFill>
+                <a:effectLst>
+                  <a:glow rad="38100">
+                    <a:schemeClr val="bg1">
+                      <a:lumMod val="50000"/>
+                      <a:lumOff val="50000"/>
+                      <a:alpha val="20000"/>
+                    </a:schemeClr>
+                  </a:glow>
+                  <a:outerShdw blurRad="44450" dist="12700" dir="13860000" algn="tl" rotWithShape="0">
+                    <a:srgbClr val="000000">
+                      <a:alpha val="20000"/>
+                    </a:srgbClr>
+                  </a:outerShdw>
+                </a:effectLst>
+                <a:latin typeface="+mn-lt"/>
+                <a:ea typeface="+mn-ea"/>
+                <a:cs typeface="+mn-cs"/>
+              </a:defRPr>
+            </a:lvl1pPr>
+            <a:lvl2pPr marL="742950" indent="-285750" algn="l" defTabSz="457200" rtl="0" eaLnBrk="1" latinLnBrk="0" hangingPunct="1">
+              <a:spcBef>
+                <a:spcPct val="20000"/>
+              </a:spcBef>
+              <a:spcAft>
+                <a:spcPts val="600"/>
+              </a:spcAft>
+              <a:buClr>
+                <a:schemeClr val="tx1"/>
+              </a:buClr>
+              <a:buSzPct val="100000"/>
+              <a:buFont typeface="Arial"/>
+              <a:buChar char="•"/>
+              <a:defRPr sz="1800" kern="1200" cap="small">
+                <a:gradFill flip="none" rotWithShape="1">
+                  <a:gsLst>
+                    <a:gs pos="0">
+                      <a:schemeClr val="tx1"/>
+                    </a:gs>
+                    <a:gs pos="100000">
+                      <a:schemeClr val="tx1">
+                        <a:lumMod val="75000"/>
+                      </a:schemeClr>
+                    </a:gs>
+                  </a:gsLst>
+                  <a:lin ang="5580000" scaled="0"/>
+                  <a:tileRect/>
+                </a:gradFill>
+                <a:effectLst>
+                  <a:glow rad="38100">
+                    <a:schemeClr val="bg1">
+                      <a:lumMod val="50000"/>
+                      <a:lumOff val="50000"/>
+                      <a:alpha val="20000"/>
+                    </a:schemeClr>
+                  </a:glow>
+                  <a:outerShdw blurRad="44450" dist="12700" dir="13860000" algn="tl" rotWithShape="0">
+                    <a:srgbClr val="000000">
+                      <a:alpha val="20000"/>
+                    </a:srgbClr>
+                  </a:outerShdw>
+                </a:effectLst>
+                <a:latin typeface="+mn-lt"/>
+                <a:ea typeface="+mn-ea"/>
+                <a:cs typeface="+mn-cs"/>
+              </a:defRPr>
+            </a:lvl2pPr>
+            <a:lvl3pPr marL="1200150" indent="-285750" algn="l" defTabSz="457200" rtl="0" eaLnBrk="1" latinLnBrk="0" hangingPunct="1">
+              <a:spcBef>
+                <a:spcPct val="20000"/>
+              </a:spcBef>
+              <a:spcAft>
+                <a:spcPts val="600"/>
+              </a:spcAft>
+              <a:buClr>
+                <a:schemeClr val="tx1"/>
+              </a:buClr>
+              <a:buSzPct val="100000"/>
+              <a:buFont typeface="Arial"/>
+              <a:buChar char="•"/>
+              <a:defRPr sz="1600" kern="1200" cap="small">
+                <a:gradFill flip="none" rotWithShape="1">
+                  <a:gsLst>
+                    <a:gs pos="0">
+                      <a:schemeClr val="tx1"/>
+                    </a:gs>
+                    <a:gs pos="100000">
+                      <a:schemeClr val="tx1">
+                        <a:lumMod val="75000"/>
+                      </a:schemeClr>
+                    </a:gs>
+                  </a:gsLst>
+                  <a:lin ang="5580000" scaled="0"/>
+                  <a:tileRect/>
+                </a:gradFill>
+                <a:effectLst>
+                  <a:glow rad="38100">
+                    <a:schemeClr val="bg1">
+                      <a:lumMod val="50000"/>
+                      <a:lumOff val="50000"/>
+                      <a:alpha val="20000"/>
+                    </a:schemeClr>
+                  </a:glow>
+                  <a:outerShdw blurRad="44450" dist="12700" dir="13860000" algn="tl" rotWithShape="0">
+                    <a:srgbClr val="000000">
+                      <a:alpha val="20000"/>
+                    </a:srgbClr>
+                  </a:outerShdw>
+                </a:effectLst>
+                <a:latin typeface="+mn-lt"/>
+                <a:ea typeface="+mn-ea"/>
+                <a:cs typeface="+mn-cs"/>
+              </a:defRPr>
+            </a:lvl3pPr>
+            <a:lvl4pPr marL="1543050" indent="-171450" algn="l" defTabSz="457200" rtl="0" eaLnBrk="1" latinLnBrk="0" hangingPunct="1">
+              <a:spcBef>
+                <a:spcPct val="20000"/>
+              </a:spcBef>
+              <a:spcAft>
+                <a:spcPts val="600"/>
+              </a:spcAft>
+              <a:buClr>
+                <a:schemeClr val="tx1"/>
+              </a:buClr>
+              <a:buSzPct val="100000"/>
+              <a:buFont typeface="Arial"/>
+              <a:buChar char="•"/>
+              <a:defRPr sz="1400" kern="1200" cap="small">
+                <a:gradFill flip="none" rotWithShape="1">
+                  <a:gsLst>
+                    <a:gs pos="0">
+                      <a:schemeClr val="tx1"/>
+                    </a:gs>
+                    <a:gs pos="100000">
+                      <a:schemeClr val="tx1">
+                        <a:lumMod val="75000"/>
+                      </a:schemeClr>
+                    </a:gs>
+                  </a:gsLst>
+                  <a:lin ang="5580000" scaled="0"/>
+                  <a:tileRect/>
+                </a:gradFill>
+                <a:effectLst>
+                  <a:glow rad="38100">
+                    <a:schemeClr val="bg1">
+                      <a:lumMod val="50000"/>
+                      <a:lumOff val="50000"/>
+                      <a:alpha val="20000"/>
+                    </a:schemeClr>
+                  </a:glow>
+                  <a:outerShdw blurRad="44450" dist="12700" dir="13860000" algn="tl" rotWithShape="0">
+                    <a:srgbClr val="000000">
+                      <a:alpha val="20000"/>
+                    </a:srgbClr>
+                  </a:outerShdw>
+                </a:effectLst>
+                <a:latin typeface="+mn-lt"/>
+                <a:ea typeface="+mn-ea"/>
+                <a:cs typeface="+mn-cs"/>
+              </a:defRPr>
+            </a:lvl4pPr>
+            <a:lvl5pPr marL="2000250" indent="-171450" algn="l" defTabSz="457200" rtl="0" eaLnBrk="1" latinLnBrk="0" hangingPunct="1">
+              <a:spcBef>
+                <a:spcPct val="20000"/>
+              </a:spcBef>
+              <a:spcAft>
+                <a:spcPts val="600"/>
+              </a:spcAft>
+              <a:buClr>
+                <a:schemeClr val="tx1"/>
+              </a:buClr>
+              <a:buSzPct val="100000"/>
+              <a:buFont typeface="Arial"/>
+              <a:buChar char="•"/>
+              <a:defRPr sz="1400" kern="1200" cap="small">
+                <a:gradFill flip="none" rotWithShape="1">
+                  <a:gsLst>
+                    <a:gs pos="0">
+                      <a:schemeClr val="tx1"/>
+                    </a:gs>
+                    <a:gs pos="100000">
+                      <a:schemeClr val="tx1">
+                        <a:lumMod val="75000"/>
+                      </a:schemeClr>
+                    </a:gs>
+                  </a:gsLst>
+                  <a:lin ang="5580000" scaled="0"/>
+                  <a:tileRect/>
+                </a:gradFill>
+                <a:effectLst>
+                  <a:glow rad="38100">
+                    <a:schemeClr val="bg1">
+                      <a:lumMod val="50000"/>
+                      <a:lumOff val="50000"/>
+                      <a:alpha val="20000"/>
+                    </a:schemeClr>
+                  </a:glow>
+                  <a:outerShdw blurRad="44450" dist="12700" dir="13860000" algn="tl" rotWithShape="0">
+                    <a:srgbClr val="000000">
+                      <a:alpha val="20000"/>
+                    </a:srgbClr>
+                  </a:outerShdw>
+                </a:effectLst>
+                <a:latin typeface="+mn-lt"/>
+                <a:ea typeface="+mn-ea"/>
+                <a:cs typeface="+mn-cs"/>
+              </a:defRPr>
+            </a:lvl5pPr>
+            <a:lvl6pPr marL="2514600" indent="-228600" algn="l" defTabSz="457200" rtl="0" eaLnBrk="1" latinLnBrk="0" hangingPunct="1">
+              <a:spcBef>
+                <a:spcPct val="20000"/>
+              </a:spcBef>
+              <a:spcAft>
+                <a:spcPts val="600"/>
+              </a:spcAft>
+              <a:buClr>
+                <a:schemeClr val="tx1"/>
+              </a:buClr>
+              <a:buSzPct val="100000"/>
+              <a:buFont typeface="Arial"/>
+              <a:buChar char="•"/>
+              <a:defRPr sz="1200" kern="1200" cap="small">
+                <a:gradFill flip="none" rotWithShape="1">
+                  <a:gsLst>
+                    <a:gs pos="0">
+                      <a:schemeClr val="tx1"/>
+                    </a:gs>
+                    <a:gs pos="100000">
+                      <a:schemeClr val="tx1">
+                        <a:lumMod val="75000"/>
+                      </a:schemeClr>
+                    </a:gs>
+                  </a:gsLst>
+                  <a:lin ang="5580000" scaled="0"/>
+                  <a:tileRect/>
+                </a:gradFill>
+                <a:effectLst>
+                  <a:glow rad="38100">
+                    <a:schemeClr val="bg1">
+                      <a:lumMod val="50000"/>
+                      <a:lumOff val="50000"/>
+                      <a:alpha val="20000"/>
+                    </a:schemeClr>
+                  </a:glow>
+                  <a:outerShdw blurRad="44450" dist="12700" dir="13860000" algn="tl" rotWithShape="0">
+                    <a:srgbClr val="000000">
+                      <a:alpha val="20000"/>
+                    </a:srgbClr>
+                  </a:outerShdw>
+                </a:effectLst>
+                <a:latin typeface="+mn-lt"/>
+                <a:ea typeface="+mn-ea"/>
+                <a:cs typeface="+mn-cs"/>
+              </a:defRPr>
+            </a:lvl6pPr>
+            <a:lvl7pPr marL="2971800" indent="-228600" algn="l" defTabSz="457200" rtl="0" eaLnBrk="1" latinLnBrk="0" hangingPunct="1">
+              <a:spcBef>
+                <a:spcPct val="20000"/>
+              </a:spcBef>
+              <a:spcAft>
+                <a:spcPts val="600"/>
+              </a:spcAft>
+              <a:buClr>
+                <a:schemeClr val="tx1"/>
+              </a:buClr>
+              <a:buSzPct val="100000"/>
+              <a:buFont typeface="Arial"/>
+              <a:buChar char="•"/>
+              <a:defRPr sz="1200" kern="1200" cap="small">
+                <a:gradFill flip="none" rotWithShape="1">
+                  <a:gsLst>
+                    <a:gs pos="0">
+                      <a:schemeClr val="tx1"/>
+                    </a:gs>
+                    <a:gs pos="100000">
+                      <a:schemeClr val="tx1">
+                        <a:lumMod val="75000"/>
+                      </a:schemeClr>
+                    </a:gs>
+                  </a:gsLst>
+                  <a:lin ang="5580000" scaled="0"/>
+                  <a:tileRect/>
+                </a:gradFill>
+                <a:effectLst>
+                  <a:glow rad="38100">
+                    <a:schemeClr val="bg1">
+                      <a:lumMod val="50000"/>
+                      <a:lumOff val="50000"/>
+                      <a:alpha val="20000"/>
+                    </a:schemeClr>
+                  </a:glow>
+                  <a:outerShdw blurRad="44450" dist="12700" dir="13860000" algn="tl" rotWithShape="0">
+                    <a:srgbClr val="000000">
+                      <a:alpha val="20000"/>
+                    </a:srgbClr>
+                  </a:outerShdw>
+                </a:effectLst>
+                <a:latin typeface="+mn-lt"/>
+                <a:ea typeface="+mn-ea"/>
+                <a:cs typeface="+mn-cs"/>
+              </a:defRPr>
+            </a:lvl7pPr>
+            <a:lvl8pPr marL="3429000" indent="-228600" algn="l" defTabSz="457200" rtl="0" eaLnBrk="1" latinLnBrk="0" hangingPunct="1">
+              <a:spcBef>
+                <a:spcPct val="20000"/>
+              </a:spcBef>
+              <a:spcAft>
+                <a:spcPts val="600"/>
+              </a:spcAft>
+              <a:buClr>
+                <a:schemeClr val="tx1"/>
+              </a:buClr>
+              <a:buSzPct val="100000"/>
+              <a:buFont typeface="Arial"/>
+              <a:buChar char="•"/>
+              <a:defRPr sz="1200" kern="1200" cap="small">
+                <a:gradFill flip="none" rotWithShape="1">
+                  <a:gsLst>
+                    <a:gs pos="0">
+                      <a:schemeClr val="tx1"/>
+                    </a:gs>
+                    <a:gs pos="100000">
+                      <a:schemeClr val="tx1">
+                        <a:lumMod val="75000"/>
+                      </a:schemeClr>
+                    </a:gs>
+                  </a:gsLst>
+                  <a:lin ang="5580000" scaled="0"/>
+                  <a:tileRect/>
+                </a:gradFill>
+                <a:effectLst>
+                  <a:glow rad="38100">
+                    <a:schemeClr val="bg1">
+                      <a:lumMod val="50000"/>
+                      <a:lumOff val="50000"/>
+                      <a:alpha val="20000"/>
+                    </a:schemeClr>
+                  </a:glow>
+                  <a:outerShdw blurRad="44450" dist="12700" dir="13860000" algn="tl" rotWithShape="0">
+                    <a:srgbClr val="000000">
+                      <a:alpha val="20000"/>
+                    </a:srgbClr>
+                  </a:outerShdw>
+                </a:effectLst>
+                <a:latin typeface="+mn-lt"/>
+                <a:ea typeface="+mn-ea"/>
+                <a:cs typeface="+mn-cs"/>
+              </a:defRPr>
+            </a:lvl8pPr>
+            <a:lvl9pPr marL="3886200" indent="-228600" algn="l" defTabSz="457200" rtl="0" eaLnBrk="1" latinLnBrk="0" hangingPunct="1">
+              <a:spcBef>
+                <a:spcPct val="20000"/>
+              </a:spcBef>
+              <a:spcAft>
+                <a:spcPts val="600"/>
+              </a:spcAft>
+              <a:buClr>
+                <a:schemeClr val="tx1"/>
+              </a:buClr>
+              <a:buSzPct val="100000"/>
+              <a:buFont typeface="Arial"/>
+              <a:buChar char="•"/>
+              <a:defRPr sz="1200" kern="1200" cap="small">
+                <a:gradFill flip="none" rotWithShape="1">
+                  <a:gsLst>
+                    <a:gs pos="0">
+                      <a:schemeClr val="tx1"/>
+                    </a:gs>
+                    <a:gs pos="100000">
+                      <a:schemeClr val="tx1">
+                        <a:lumMod val="75000"/>
+                      </a:schemeClr>
+                    </a:gs>
+                  </a:gsLst>
+                  <a:lin ang="5580000" scaled="0"/>
+                  <a:tileRect/>
+                </a:gradFill>
+                <a:effectLst>
+                  <a:glow rad="38100">
+                    <a:schemeClr val="bg1">
+                      <a:lumMod val="50000"/>
+                      <a:lumOff val="50000"/>
+                      <a:alpha val="20000"/>
+                    </a:schemeClr>
+                  </a:glow>
+                  <a:outerShdw blurRad="44450" dist="12700" dir="13860000" algn="tl" rotWithShape="0">
+                    <a:srgbClr val="000000">
+                      <a:alpha val="20000"/>
+                    </a:srgbClr>
+                  </a:outerShdw>
+                </a:effectLst>
+                <a:latin typeface="+mn-lt"/>
+                <a:ea typeface="+mn-ea"/>
+                <a:cs typeface="+mn-cs"/>
+              </a:defRPr>
+            </a:lvl9pPr>
+          </a:lstStyle>
+          <a:p>
+            <a:pPr marL="0" indent="0">
+              <a:buFont typeface="Arial"/>
+              <a:buNone/>
+            </a:pPr>
+            <a:r>
+              <a:rPr lang="es-CO" sz="1400" b="1" cap="all" dirty="0">
+                <a:solidFill>
+                  <a:srgbClr val="C9AA4D"/>
+                </a:solidFill>
+                <a:effectLst/>
+              </a:rPr>
+              <a:t>Alertas escalonadas</a:t>
+            </a:r>
+          </a:p>
+          <a:p>
+            <a:pPr marL="0" indent="0">
+              <a:buFont typeface="Arial"/>
+              <a:buNone/>
+            </a:pPr>
+            <a:r>
+              <a:rPr lang="es-MX" sz="1300" cap="none" dirty="0">
+                <a:solidFill>
+                  <a:srgbClr val="ACA9A7"/>
+                </a:solidFill>
+                <a:effectLst/>
+              </a:rPr>
+              <a:t>Notificaciones al 50%, 80% y 100% del presupuesto.</a:t>
+            </a:r>
+            <a:endParaRPr lang="es-CO" sz="1300" cap="all" dirty="0">
+              <a:solidFill>
+                <a:srgbClr val="ACA9A7"/>
+              </a:solidFill>
+              <a:effectLst/>
+            </a:endParaRPr>
+          </a:p>
+        </p:txBody>
+      </p:sp>
+      <p:sp>
+        <p:nvSpPr>
+          <p:cNvPr id="14" name="Marcador de contenido 2">
+            <a:extLst>
+              <a:ext uri="{FF2B5EF4-FFF2-40B4-BE49-F238E27FC236}">
+                <a16:creationId xmlns:a16="http://schemas.microsoft.com/office/drawing/2014/main" id="{C3C301AE-87E5-2E9E-A796-839CCC065A63}"/>
+              </a:ext>
+            </a:extLst>
+          </p:cNvPr>
+          <p:cNvSpPr txBox="1">
+            <a:spLocks/>
+          </p:cNvSpPr>
+          <p:nvPr/>
+        </p:nvSpPr>
+        <p:spPr>
+          <a:xfrm>
+            <a:off x="609143" y="4691453"/>
+            <a:ext cx="10973714" cy="688395"/>
+          </a:xfrm>
+          <a:prstGeom prst="roundRect">
+            <a:avLst/>
+          </a:prstGeom>
+          <a:solidFill>
+            <a:srgbClr val="252E3C"/>
+          </a:solidFill>
+          <a:ln>
+            <a:solidFill>
+              <a:srgbClr val="343A3E"/>
+            </a:solidFill>
+          </a:ln>
+        </p:spPr>
+        <p:txBody>
+          <a:bodyPr vert="horz" lIns="91440" tIns="45720" rIns="91440" bIns="45720" rtlCol="0" anchor="ctr">
+            <a:normAutofit/>
+          </a:bodyPr>
+          <a:lstStyle>
+            <a:lvl1pPr marL="285750" indent="-285750" algn="l" defTabSz="457200" rtl="0" eaLnBrk="1" latinLnBrk="0" hangingPunct="1">
+              <a:spcBef>
+                <a:spcPct val="20000"/>
+              </a:spcBef>
+              <a:spcAft>
+                <a:spcPts val="600"/>
+              </a:spcAft>
+              <a:buClr>
+                <a:schemeClr val="tx1"/>
+              </a:buClr>
+              <a:buSzPct val="100000"/>
+              <a:buFont typeface="Arial"/>
+              <a:buChar char="•"/>
+              <a:defRPr sz="2000" kern="1200" cap="small">
+                <a:gradFill flip="none" rotWithShape="1">
+                  <a:gsLst>
+                    <a:gs pos="0">
+                      <a:schemeClr val="tx1"/>
+                    </a:gs>
+                    <a:gs pos="100000">
+                      <a:schemeClr val="tx1">
+                        <a:lumMod val="75000"/>
+                      </a:schemeClr>
+                    </a:gs>
+                  </a:gsLst>
+                  <a:lin ang="5580000" scaled="0"/>
+                  <a:tileRect/>
+                </a:gradFill>
+                <a:effectLst>
+                  <a:glow rad="38100">
+                    <a:schemeClr val="bg1">
+                      <a:lumMod val="50000"/>
+                      <a:lumOff val="50000"/>
+                      <a:alpha val="20000"/>
+                    </a:schemeClr>
+                  </a:glow>
+                  <a:outerShdw blurRad="44450" dist="12700" dir="13860000" algn="tl" rotWithShape="0">
+                    <a:srgbClr val="000000">
+                      <a:alpha val="20000"/>
+                    </a:srgbClr>
+                  </a:outerShdw>
+                </a:effectLst>
+                <a:latin typeface="+mn-lt"/>
+                <a:ea typeface="+mn-ea"/>
+                <a:cs typeface="+mn-cs"/>
+              </a:defRPr>
+            </a:lvl1pPr>
+            <a:lvl2pPr marL="742950" indent="-285750" algn="l" defTabSz="457200" rtl="0" eaLnBrk="1" latinLnBrk="0" hangingPunct="1">
+              <a:spcBef>
+                <a:spcPct val="20000"/>
+              </a:spcBef>
+              <a:spcAft>
+                <a:spcPts val="600"/>
+              </a:spcAft>
+              <a:buClr>
+                <a:schemeClr val="tx1"/>
+              </a:buClr>
+              <a:buSzPct val="100000"/>
+              <a:buFont typeface="Arial"/>
+              <a:buChar char="•"/>
+              <a:defRPr sz="1800" kern="1200" cap="small">
+                <a:gradFill flip="none" rotWithShape="1">
+                  <a:gsLst>
+                    <a:gs pos="0">
+                      <a:schemeClr val="tx1"/>
+                    </a:gs>
+                    <a:gs pos="100000">
+                      <a:schemeClr val="tx1">
+                        <a:lumMod val="75000"/>
+                      </a:schemeClr>
+                    </a:gs>
+                  </a:gsLst>
+                  <a:lin ang="5580000" scaled="0"/>
+                  <a:tileRect/>
+                </a:gradFill>
+                <a:effectLst>
+                  <a:glow rad="38100">
+                    <a:schemeClr val="bg1">
+                      <a:lumMod val="50000"/>
+                      <a:lumOff val="50000"/>
+                      <a:alpha val="20000"/>
+                    </a:schemeClr>
+                  </a:glow>
+                  <a:outerShdw blurRad="44450" dist="12700" dir="13860000" algn="tl" rotWithShape="0">
+                    <a:srgbClr val="000000">
+                      <a:alpha val="20000"/>
+                    </a:srgbClr>
+                  </a:outerShdw>
+                </a:effectLst>
+                <a:latin typeface="+mn-lt"/>
+                <a:ea typeface="+mn-ea"/>
+                <a:cs typeface="+mn-cs"/>
+              </a:defRPr>
+            </a:lvl2pPr>
+            <a:lvl3pPr marL="1200150" indent="-285750" algn="l" defTabSz="457200" rtl="0" eaLnBrk="1" latinLnBrk="0" hangingPunct="1">
+              <a:spcBef>
+                <a:spcPct val="20000"/>
+              </a:spcBef>
+              <a:spcAft>
+                <a:spcPts val="600"/>
+              </a:spcAft>
+              <a:buClr>
+                <a:schemeClr val="tx1"/>
+              </a:buClr>
+              <a:buSzPct val="100000"/>
+              <a:buFont typeface="Arial"/>
+              <a:buChar char="•"/>
+              <a:defRPr sz="1600" kern="1200" cap="small">
+                <a:gradFill flip="none" rotWithShape="1">
+                  <a:gsLst>
+                    <a:gs pos="0">
+                      <a:schemeClr val="tx1"/>
+                    </a:gs>
+                    <a:gs pos="100000">
+                      <a:schemeClr val="tx1">
+                        <a:lumMod val="75000"/>
+                      </a:schemeClr>
+                    </a:gs>
+                  </a:gsLst>
+                  <a:lin ang="5580000" scaled="0"/>
+                  <a:tileRect/>
+                </a:gradFill>
+                <a:effectLst>
+                  <a:glow rad="38100">
+                    <a:schemeClr val="bg1">
+                      <a:lumMod val="50000"/>
+                      <a:lumOff val="50000"/>
+                      <a:alpha val="20000"/>
+                    </a:schemeClr>
+                  </a:glow>
+                  <a:outerShdw blurRad="44450" dist="12700" dir="13860000" algn="tl" rotWithShape="0">
+                    <a:srgbClr val="000000">
+                      <a:alpha val="20000"/>
+                    </a:srgbClr>
+                  </a:outerShdw>
+                </a:effectLst>
+                <a:latin typeface="+mn-lt"/>
+                <a:ea typeface="+mn-ea"/>
+                <a:cs typeface="+mn-cs"/>
+              </a:defRPr>
+            </a:lvl3pPr>
+            <a:lvl4pPr marL="1543050" indent="-171450" algn="l" defTabSz="457200" rtl="0" eaLnBrk="1" latinLnBrk="0" hangingPunct="1">
+              <a:spcBef>
+                <a:spcPct val="20000"/>
+              </a:spcBef>
+              <a:spcAft>
+                <a:spcPts val="600"/>
+              </a:spcAft>
+              <a:buClr>
+                <a:schemeClr val="tx1"/>
+              </a:buClr>
+              <a:buSzPct val="100000"/>
+              <a:buFont typeface="Arial"/>
+              <a:buChar char="•"/>
+              <a:defRPr sz="1400" kern="1200" cap="small">
+                <a:gradFill flip="none" rotWithShape="1">
+                  <a:gsLst>
+                    <a:gs pos="0">
+                      <a:schemeClr val="tx1"/>
+                    </a:gs>
+                    <a:gs pos="100000">
+                      <a:schemeClr val="tx1">
+                        <a:lumMod val="75000"/>
+                      </a:schemeClr>
+                    </a:gs>
+                  </a:gsLst>
+                  <a:lin ang="5580000" scaled="0"/>
+                  <a:tileRect/>
+                </a:gradFill>
+                <a:effectLst>
+                  <a:glow rad="38100">
+                    <a:schemeClr val="bg1">
+                      <a:lumMod val="50000"/>
+                      <a:lumOff val="50000"/>
+                      <a:alpha val="20000"/>
+                    </a:schemeClr>
+                  </a:glow>
+                  <a:outerShdw blurRad="44450" dist="12700" dir="13860000" algn="tl" rotWithShape="0">
+                    <a:srgbClr val="000000">
+                      <a:alpha val="20000"/>
+                    </a:srgbClr>
+                  </a:outerShdw>
+                </a:effectLst>
+                <a:latin typeface="+mn-lt"/>
+                <a:ea typeface="+mn-ea"/>
+                <a:cs typeface="+mn-cs"/>
+              </a:defRPr>
+            </a:lvl4pPr>
+            <a:lvl5pPr marL="2000250" indent="-171450" algn="l" defTabSz="457200" rtl="0" eaLnBrk="1" latinLnBrk="0" hangingPunct="1">
+              <a:spcBef>
+                <a:spcPct val="20000"/>
+              </a:spcBef>
+              <a:spcAft>
+                <a:spcPts val="600"/>
+              </a:spcAft>
+              <a:buClr>
+                <a:schemeClr val="tx1"/>
+              </a:buClr>
+              <a:buSzPct val="100000"/>
+              <a:buFont typeface="Arial"/>
+              <a:buChar char="•"/>
+              <a:defRPr sz="1400" kern="1200" cap="small">
+                <a:gradFill flip="none" rotWithShape="1">
+                  <a:gsLst>
+                    <a:gs pos="0">
+                      <a:schemeClr val="tx1"/>
+                    </a:gs>
+                    <a:gs pos="100000">
+                      <a:schemeClr val="tx1">
+                        <a:lumMod val="75000"/>
+                      </a:schemeClr>
+                    </a:gs>
+                  </a:gsLst>
+                  <a:lin ang="5580000" scaled="0"/>
+                  <a:tileRect/>
+                </a:gradFill>
+                <a:effectLst>
+                  <a:glow rad="38100">
+                    <a:schemeClr val="bg1">
+                      <a:lumMod val="50000"/>
+                      <a:lumOff val="50000"/>
+                      <a:alpha val="20000"/>
+                    </a:schemeClr>
+                  </a:glow>
+                  <a:outerShdw blurRad="44450" dist="12700" dir="13860000" algn="tl" rotWithShape="0">
+                    <a:srgbClr val="000000">
+                      <a:alpha val="20000"/>
+                    </a:srgbClr>
+                  </a:outerShdw>
+                </a:effectLst>
+                <a:latin typeface="+mn-lt"/>
+                <a:ea typeface="+mn-ea"/>
+                <a:cs typeface="+mn-cs"/>
+              </a:defRPr>
+            </a:lvl5pPr>
+            <a:lvl6pPr marL="2514600" indent="-228600" algn="l" defTabSz="457200" rtl="0" eaLnBrk="1" latinLnBrk="0" hangingPunct="1">
+              <a:spcBef>
+                <a:spcPct val="20000"/>
+              </a:spcBef>
+              <a:spcAft>
+                <a:spcPts val="600"/>
+              </a:spcAft>
+              <a:buClr>
+                <a:schemeClr val="tx1"/>
+              </a:buClr>
+              <a:buSzPct val="100000"/>
+              <a:buFont typeface="Arial"/>
+              <a:buChar char="•"/>
+              <a:defRPr sz="1200" kern="1200" cap="small">
+                <a:gradFill flip="none" rotWithShape="1">
+                  <a:gsLst>
+                    <a:gs pos="0">
+                      <a:schemeClr val="tx1"/>
+                    </a:gs>
+                    <a:gs pos="100000">
+                      <a:schemeClr val="tx1">
+                        <a:lumMod val="75000"/>
+                      </a:schemeClr>
+                    </a:gs>
+                  </a:gsLst>
+                  <a:lin ang="5580000" scaled="0"/>
+                  <a:tileRect/>
+                </a:gradFill>
+                <a:effectLst>
+                  <a:glow rad="38100">
+                    <a:schemeClr val="bg1">
+                      <a:lumMod val="50000"/>
+                      <a:lumOff val="50000"/>
+                      <a:alpha val="20000"/>
+                    </a:schemeClr>
+                  </a:glow>
+                  <a:outerShdw blurRad="44450" dist="12700" dir="13860000" algn="tl" rotWithShape="0">
+                    <a:srgbClr val="000000">
+                      <a:alpha val="20000"/>
+                    </a:srgbClr>
+                  </a:outerShdw>
+                </a:effectLst>
+                <a:latin typeface="+mn-lt"/>
+                <a:ea typeface="+mn-ea"/>
+                <a:cs typeface="+mn-cs"/>
+              </a:defRPr>
+            </a:lvl6pPr>
+            <a:lvl7pPr marL="2971800" indent="-228600" algn="l" defTabSz="457200" rtl="0" eaLnBrk="1" latinLnBrk="0" hangingPunct="1">
+              <a:spcBef>
+                <a:spcPct val="20000"/>
+              </a:spcBef>
+              <a:spcAft>
+                <a:spcPts val="600"/>
+              </a:spcAft>
+              <a:buClr>
+                <a:schemeClr val="tx1"/>
+              </a:buClr>
+              <a:buSzPct val="100000"/>
+              <a:buFont typeface="Arial"/>
+              <a:buChar char="•"/>
+              <a:defRPr sz="1200" kern="1200" cap="small">
+                <a:gradFill flip="none" rotWithShape="1">
+                  <a:gsLst>
+                    <a:gs pos="0">
+                      <a:schemeClr val="tx1"/>
+                    </a:gs>
+                    <a:gs pos="100000">
+                      <a:schemeClr val="tx1">
+                        <a:lumMod val="75000"/>
+                      </a:schemeClr>
+                    </a:gs>
+                  </a:gsLst>
+                  <a:lin ang="5580000" scaled="0"/>
+                  <a:tileRect/>
+                </a:gradFill>
+                <a:effectLst>
+                  <a:glow rad="38100">
+                    <a:schemeClr val="bg1">
+                      <a:lumMod val="50000"/>
+                      <a:lumOff val="50000"/>
+                      <a:alpha val="20000"/>
+                    </a:schemeClr>
+                  </a:glow>
+                  <a:outerShdw blurRad="44450" dist="12700" dir="13860000" algn="tl" rotWithShape="0">
+                    <a:srgbClr val="000000">
+                      <a:alpha val="20000"/>
+                    </a:srgbClr>
+                  </a:outerShdw>
+                </a:effectLst>
+                <a:latin typeface="+mn-lt"/>
+                <a:ea typeface="+mn-ea"/>
+                <a:cs typeface="+mn-cs"/>
+              </a:defRPr>
+            </a:lvl7pPr>
+            <a:lvl8pPr marL="3429000" indent="-228600" algn="l" defTabSz="457200" rtl="0" eaLnBrk="1" latinLnBrk="0" hangingPunct="1">
+              <a:spcBef>
+                <a:spcPct val="20000"/>
+              </a:spcBef>
+              <a:spcAft>
+                <a:spcPts val="600"/>
+              </a:spcAft>
+              <a:buClr>
+                <a:schemeClr val="tx1"/>
+              </a:buClr>
+              <a:buSzPct val="100000"/>
+              <a:buFont typeface="Arial"/>
+              <a:buChar char="•"/>
+              <a:defRPr sz="1200" kern="1200" cap="small">
+                <a:gradFill flip="none" rotWithShape="1">
+                  <a:gsLst>
+                    <a:gs pos="0">
+                      <a:schemeClr val="tx1"/>
+                    </a:gs>
+                    <a:gs pos="100000">
+                      <a:schemeClr val="tx1">
+                        <a:lumMod val="75000"/>
+                      </a:schemeClr>
+                    </a:gs>
+                  </a:gsLst>
+                  <a:lin ang="5580000" scaled="0"/>
+                  <a:tileRect/>
+                </a:gradFill>
+                <a:effectLst>
+                  <a:glow rad="38100">
+                    <a:schemeClr val="bg1">
+                      <a:lumMod val="50000"/>
+                      <a:lumOff val="50000"/>
+                      <a:alpha val="20000"/>
+                    </a:schemeClr>
+                  </a:glow>
+                  <a:outerShdw blurRad="44450" dist="12700" dir="13860000" algn="tl" rotWithShape="0">
+                    <a:srgbClr val="000000">
+                      <a:alpha val="20000"/>
+                    </a:srgbClr>
+                  </a:outerShdw>
+                </a:effectLst>
+                <a:latin typeface="+mn-lt"/>
+                <a:ea typeface="+mn-ea"/>
+                <a:cs typeface="+mn-cs"/>
+              </a:defRPr>
+            </a:lvl8pPr>
+            <a:lvl9pPr marL="3886200" indent="-228600" algn="l" defTabSz="457200" rtl="0" eaLnBrk="1" latinLnBrk="0" hangingPunct="1">
+              <a:spcBef>
+                <a:spcPct val="20000"/>
+              </a:spcBef>
+              <a:spcAft>
+                <a:spcPts val="600"/>
+              </a:spcAft>
+              <a:buClr>
+                <a:schemeClr val="tx1"/>
+              </a:buClr>
+              <a:buSzPct val="100000"/>
+              <a:buFont typeface="Arial"/>
+              <a:buChar char="•"/>
+              <a:defRPr sz="1200" kern="1200" cap="small">
+                <a:gradFill flip="none" rotWithShape="1">
+                  <a:gsLst>
+                    <a:gs pos="0">
+                      <a:schemeClr val="tx1"/>
+                    </a:gs>
+                    <a:gs pos="100000">
+                      <a:schemeClr val="tx1">
+                        <a:lumMod val="75000"/>
+                      </a:schemeClr>
+                    </a:gs>
+                  </a:gsLst>
+                  <a:lin ang="5580000" scaled="0"/>
+                  <a:tileRect/>
+                </a:gradFill>
+                <a:effectLst>
+                  <a:glow rad="38100">
+                    <a:schemeClr val="bg1">
+                      <a:lumMod val="50000"/>
+                      <a:lumOff val="50000"/>
+                      <a:alpha val="20000"/>
+                    </a:schemeClr>
+                  </a:glow>
+                  <a:outerShdw blurRad="44450" dist="12700" dir="13860000" algn="tl" rotWithShape="0">
+                    <a:srgbClr val="000000">
+                      <a:alpha val="20000"/>
+                    </a:srgbClr>
+                  </a:outerShdw>
+                </a:effectLst>
+                <a:latin typeface="+mn-lt"/>
+                <a:ea typeface="+mn-ea"/>
+                <a:cs typeface="+mn-cs"/>
+              </a:defRPr>
+            </a:lvl9pPr>
+          </a:lstStyle>
+          <a:p>
+            <a:pPr marL="0" indent="0">
+              <a:buFont typeface="Arial"/>
+              <a:buNone/>
+            </a:pPr>
+            <a:r>
+              <a:rPr lang="es-CO" sz="1400" b="1" cap="all" dirty="0">
+                <a:solidFill>
+                  <a:srgbClr val="C9AA4D"/>
+                </a:solidFill>
+                <a:effectLst/>
+              </a:rPr>
+              <a:t>Optimización continua</a:t>
+            </a:r>
+          </a:p>
+          <a:p>
+            <a:pPr marL="0" indent="0">
+              <a:buFont typeface="Arial"/>
+              <a:buNone/>
+            </a:pPr>
+            <a:r>
+              <a:rPr lang="es-MX" sz="1300" cap="none" dirty="0">
+                <a:solidFill>
+                  <a:srgbClr val="ACA9A7"/>
+                </a:solidFill>
+                <a:effectLst/>
+              </a:rPr>
+              <a:t>El sistema se monitorea para identificar oportunidades de ahorro sin sacrificar rendimiento.</a:t>
+            </a:r>
+            <a:endParaRPr lang="es-CO" sz="1300" cap="all" dirty="0">
+              <a:solidFill>
+                <a:srgbClr val="ACA9A7"/>
+              </a:solidFill>
+              <a:effectLst/>
+            </a:endParaRPr>
+          </a:p>
+        </p:txBody>
+      </p:sp>
+    </p:spTree>
+    <p:extLst>
+      <p:ext uri="{BB962C8B-B14F-4D97-AF65-F5344CB8AC3E}">
+        <p14:creationId xmlns:p14="http://schemas.microsoft.com/office/powerpoint/2010/main" val="1118420417"/>
+      </p:ext>
+    </p:extLst>
+  </p:cSld>
+  <p:clrMapOvr>
+    <a:masterClrMapping/>
+  </p:clrMapOvr>
+</p:sld>
+</file>
+
+<file path=ppt/slides/slide14.xml><?xml version="1.0" encoding="utf-8"?>
+<p:sld xmlns:a="http://schemas.openxmlformats.org/drawingml/2006/main" xmlns:r="http://schemas.openxmlformats.org/officeDocument/2006/relationships" xmlns:p="http://schemas.openxmlformats.org/presentationml/2006/main">
+  <p:cSld>
+    <p:spTree>
+      <p:nvGrpSpPr>
+        <p:cNvPr id="1" name=""/>
+        <p:cNvGrpSpPr/>
+        <p:nvPr/>
+      </p:nvGrpSpPr>
+      <p:grpSpPr>
+        <a:xfrm>
+          <a:off x="0" y="0"/>
+          <a:ext cx="0" cy="0"/>
+          <a:chOff x="0" y="0"/>
+          <a:chExt cx="0" cy="0"/>
+        </a:xfrm>
+      </p:grpSpPr>
+      <p:sp>
+        <p:nvSpPr>
+          <p:cNvPr id="2" name="Título 1">
+            <a:extLst>
+              <a:ext uri="{FF2B5EF4-FFF2-40B4-BE49-F238E27FC236}">
+                <a16:creationId xmlns:a16="http://schemas.microsoft.com/office/drawing/2014/main" id="{EBF71328-1422-08C3-425F-4E2322B7A0E8}"/>
+              </a:ext>
+            </a:extLst>
+          </p:cNvPr>
+          <p:cNvSpPr>
+            <a:spLocks noGrp="1"/>
+          </p:cNvSpPr>
+          <p:nvPr>
+            <p:ph type="title"/>
+          </p:nvPr>
+        </p:nvSpPr>
+        <p:spPr>
+          <a:xfrm>
+            <a:off x="158647" y="893400"/>
+            <a:ext cx="8458051" cy="770909"/>
+          </a:xfrm>
+        </p:spPr>
+        <p:txBody>
+          <a:bodyPr>
+            <a:normAutofit/>
+          </a:bodyPr>
+          <a:lstStyle/>
+          <a:p>
+            <a:r>
+              <a:rPr lang="es-CO" b="1" dirty="0">
+                <a:effectLst/>
+              </a:rPr>
+              <a:t>Todo lo que Entregamos</a:t>
+            </a:r>
+            <a:endParaRPr lang="es-CO" b="1" dirty="0">
+              <a:solidFill>
+                <a:srgbClr val="C9AA4D"/>
+              </a:solidFill>
+            </a:endParaRPr>
+          </a:p>
+        </p:txBody>
+      </p:sp>
+      <p:sp>
+        <p:nvSpPr>
+          <p:cNvPr id="8" name="Título 1">
+            <a:extLst>
+              <a:ext uri="{FF2B5EF4-FFF2-40B4-BE49-F238E27FC236}">
+                <a16:creationId xmlns:a16="http://schemas.microsoft.com/office/drawing/2014/main" id="{E4AE4C90-82E4-2CD9-38DA-4C0A6E20C84E}"/>
+              </a:ext>
+            </a:extLst>
+          </p:cNvPr>
+          <p:cNvSpPr txBox="1">
+            <a:spLocks/>
+          </p:cNvSpPr>
+          <p:nvPr/>
+        </p:nvSpPr>
+        <p:spPr>
+          <a:xfrm>
+            <a:off x="158647" y="731520"/>
+            <a:ext cx="3416657" cy="405712"/>
+          </a:xfrm>
+          <a:prstGeom prst="rect">
+            <a:avLst/>
+          </a:prstGeom>
+        </p:spPr>
+        <p:txBody>
+          <a:bodyPr vert="horz" lIns="91440" tIns="45720" rIns="91440" bIns="45720" rtlCol="0" anchor="ctr">
+            <a:normAutofit/>
+          </a:bodyPr>
+          <a:lstStyle>
+            <a:lvl1pPr algn="l" defTabSz="457200" rtl="0" eaLnBrk="1" latinLnBrk="0" hangingPunct="1">
+              <a:spcBef>
+                <a:spcPct val="0"/>
+              </a:spcBef>
+              <a:buNone/>
+              <a:defRPr sz="3200" kern="1200" cap="all">
+                <a:ln w="3175" cmpd="sng">
+                  <a:noFill/>
+                </a:ln>
+                <a:gradFill flip="none" rotWithShape="1">
+                  <a:gsLst>
+                    <a:gs pos="0">
+                      <a:schemeClr val="tx1"/>
+                    </a:gs>
+                    <a:gs pos="100000">
+                      <a:schemeClr val="tx1">
+                        <a:lumMod val="65000"/>
+                      </a:schemeClr>
+                    </a:gs>
+                  </a:gsLst>
+                  <a:lin ang="5580000" scaled="0"/>
+                  <a:tileRect/>
+                </a:gradFill>
+                <a:effectLst>
+                  <a:glow rad="38100">
+                    <a:schemeClr val="bg1">
+                      <a:lumMod val="65000"/>
+                      <a:lumOff val="35000"/>
+                      <a:alpha val="40000"/>
+                    </a:schemeClr>
+                  </a:glow>
+                  <a:outerShdw blurRad="28575" dist="38100" dir="14040000" algn="tl" rotWithShape="0">
+                    <a:srgbClr val="000000">
+                      <a:alpha val="25000"/>
+                    </a:srgbClr>
+                  </a:outerShdw>
+                </a:effectLst>
+                <a:latin typeface="+mj-lt"/>
+                <a:ea typeface="+mj-ea"/>
+                <a:cs typeface="+mj-cs"/>
+              </a:defRPr>
+            </a:lvl1pPr>
+            <a:lvl2pPr eaLnBrk="1" hangingPunct="1">
+              <a:defRPr>
+                <a:solidFill>
+                  <a:schemeClr val="tx2"/>
+                </a:solidFill>
+              </a:defRPr>
+            </a:lvl2pPr>
+            <a:lvl3pPr eaLnBrk="1" hangingPunct="1">
+              <a:defRPr>
+                <a:solidFill>
+                  <a:schemeClr val="tx2"/>
+                </a:solidFill>
+              </a:defRPr>
+            </a:lvl3pPr>
+            <a:lvl4pPr eaLnBrk="1" hangingPunct="1">
+              <a:defRPr>
+                <a:solidFill>
+                  <a:schemeClr val="tx2"/>
+                </a:solidFill>
+              </a:defRPr>
+            </a:lvl4pPr>
+            <a:lvl5pPr eaLnBrk="1" hangingPunct="1">
+              <a:defRPr>
+                <a:solidFill>
+                  <a:schemeClr val="tx2"/>
+                </a:solidFill>
+              </a:defRPr>
+            </a:lvl5pPr>
+            <a:lvl6pPr eaLnBrk="1" hangingPunct="1">
+              <a:defRPr>
+                <a:solidFill>
+                  <a:schemeClr val="tx2"/>
+                </a:solidFill>
+              </a:defRPr>
+            </a:lvl6pPr>
+            <a:lvl7pPr eaLnBrk="1" hangingPunct="1">
+              <a:defRPr>
+                <a:solidFill>
+                  <a:schemeClr val="tx2"/>
+                </a:solidFill>
+              </a:defRPr>
+            </a:lvl7pPr>
+            <a:lvl8pPr eaLnBrk="1" hangingPunct="1">
+              <a:defRPr>
+                <a:solidFill>
+                  <a:schemeClr val="tx2"/>
+                </a:solidFill>
+              </a:defRPr>
+            </a:lvl8pPr>
+            <a:lvl9pPr eaLnBrk="1" hangingPunct="1">
+              <a:defRPr>
+                <a:solidFill>
+                  <a:schemeClr val="tx2"/>
+                </a:solidFill>
+              </a:defRPr>
+            </a:lvl9pPr>
+          </a:lstStyle>
+          <a:p>
+            <a:r>
+              <a:rPr lang="es-CO" sz="1400" b="1" i="0" cap="all" dirty="0">
+                <a:solidFill>
+                  <a:srgbClr val="C9A94E"/>
+                </a:solidFill>
+                <a:effectLst/>
+              </a:rPr>
+              <a:t>Independencia</a:t>
+            </a:r>
+            <a:endParaRPr lang="es-CO" sz="1400" b="1" dirty="0">
+              <a:solidFill>
+                <a:srgbClr val="C9AA4D"/>
+              </a:solidFill>
+              <a:cs typeface="Courier New" panose="02070309020205020404" pitchFamily="49" charset="0"/>
+            </a:endParaRPr>
+          </a:p>
+        </p:txBody>
+      </p:sp>
+      <p:sp>
+        <p:nvSpPr>
+          <p:cNvPr id="3" name="Marcador de contenido 2">
+            <a:extLst>
+              <a:ext uri="{FF2B5EF4-FFF2-40B4-BE49-F238E27FC236}">
+                <a16:creationId xmlns:a16="http://schemas.microsoft.com/office/drawing/2014/main" id="{90A26153-1CD0-55B7-3D7A-F16CD8E4C746}"/>
+              </a:ext>
+            </a:extLst>
+          </p:cNvPr>
+          <p:cNvSpPr txBox="1">
+            <a:spLocks/>
+          </p:cNvSpPr>
+          <p:nvPr/>
+        </p:nvSpPr>
+        <p:spPr>
+          <a:xfrm>
+            <a:off x="1014835" y="2196173"/>
+            <a:ext cx="4737939" cy="1298448"/>
+          </a:xfrm>
+          <a:prstGeom prst="roundRect">
+            <a:avLst/>
+          </a:prstGeom>
+          <a:solidFill>
+            <a:srgbClr val="252E3C"/>
+          </a:solidFill>
+          <a:ln>
+            <a:solidFill>
+              <a:srgbClr val="343A3E"/>
+            </a:solidFill>
+          </a:ln>
+        </p:spPr>
+        <p:txBody>
+          <a:bodyPr vert="horz" lIns="91440" tIns="45720" rIns="91440" bIns="45720" rtlCol="0" anchor="ctr">
+            <a:normAutofit/>
+          </a:bodyPr>
+          <a:lstStyle>
+            <a:lvl1pPr marL="285750" indent="-285750" algn="l" defTabSz="457200" rtl="0" eaLnBrk="1" latinLnBrk="0" hangingPunct="1">
+              <a:spcBef>
+                <a:spcPct val="20000"/>
+              </a:spcBef>
+              <a:spcAft>
+                <a:spcPts val="600"/>
+              </a:spcAft>
+              <a:buClr>
+                <a:schemeClr val="tx1"/>
+              </a:buClr>
+              <a:buSzPct val="100000"/>
+              <a:buFont typeface="Arial"/>
+              <a:buChar char="•"/>
+              <a:defRPr sz="2000" kern="1200" cap="small">
+                <a:gradFill flip="none" rotWithShape="1">
+                  <a:gsLst>
+                    <a:gs pos="0">
+                      <a:schemeClr val="tx1"/>
+                    </a:gs>
+                    <a:gs pos="100000">
+                      <a:schemeClr val="tx1">
+                        <a:lumMod val="75000"/>
+                      </a:schemeClr>
+                    </a:gs>
+                  </a:gsLst>
+                  <a:lin ang="5580000" scaled="0"/>
+                  <a:tileRect/>
+                </a:gradFill>
+                <a:effectLst>
+                  <a:glow rad="38100">
+                    <a:schemeClr val="bg1">
+                      <a:lumMod val="50000"/>
+                      <a:lumOff val="50000"/>
+                      <a:alpha val="20000"/>
+                    </a:schemeClr>
+                  </a:glow>
+                  <a:outerShdw blurRad="44450" dist="12700" dir="13860000" algn="tl" rotWithShape="0">
+                    <a:srgbClr val="000000">
+                      <a:alpha val="20000"/>
+                    </a:srgbClr>
+                  </a:outerShdw>
+                </a:effectLst>
+                <a:latin typeface="+mn-lt"/>
+                <a:ea typeface="+mn-ea"/>
+                <a:cs typeface="+mn-cs"/>
+              </a:defRPr>
+            </a:lvl1pPr>
+            <a:lvl2pPr marL="742950" indent="-285750" algn="l" defTabSz="457200" rtl="0" eaLnBrk="1" latinLnBrk="0" hangingPunct="1">
+              <a:spcBef>
+                <a:spcPct val="20000"/>
+              </a:spcBef>
+              <a:spcAft>
+                <a:spcPts val="600"/>
+              </a:spcAft>
+              <a:buClr>
+                <a:schemeClr val="tx1"/>
+              </a:buClr>
+              <a:buSzPct val="100000"/>
+              <a:buFont typeface="Arial"/>
+              <a:buChar char="•"/>
+              <a:defRPr sz="1800" kern="1200" cap="small">
+                <a:gradFill flip="none" rotWithShape="1">
+                  <a:gsLst>
+                    <a:gs pos="0">
+                      <a:schemeClr val="tx1"/>
+                    </a:gs>
+                    <a:gs pos="100000">
+                      <a:schemeClr val="tx1">
+                        <a:lumMod val="75000"/>
+                      </a:schemeClr>
+                    </a:gs>
+                  </a:gsLst>
+                  <a:lin ang="5580000" scaled="0"/>
+                  <a:tileRect/>
+                </a:gradFill>
+                <a:effectLst>
+                  <a:glow rad="38100">
+                    <a:schemeClr val="bg1">
+                      <a:lumMod val="50000"/>
+                      <a:lumOff val="50000"/>
+                      <a:alpha val="20000"/>
+                    </a:schemeClr>
+                  </a:glow>
+                  <a:outerShdw blurRad="44450" dist="12700" dir="13860000" algn="tl" rotWithShape="0">
+                    <a:srgbClr val="000000">
+                      <a:alpha val="20000"/>
+                    </a:srgbClr>
+                  </a:outerShdw>
+                </a:effectLst>
+                <a:latin typeface="+mn-lt"/>
+                <a:ea typeface="+mn-ea"/>
+                <a:cs typeface="+mn-cs"/>
+              </a:defRPr>
+            </a:lvl2pPr>
+            <a:lvl3pPr marL="1200150" indent="-285750" algn="l" defTabSz="457200" rtl="0" eaLnBrk="1" latinLnBrk="0" hangingPunct="1">
+              <a:spcBef>
+                <a:spcPct val="20000"/>
+              </a:spcBef>
+              <a:spcAft>
+                <a:spcPts val="600"/>
+              </a:spcAft>
+              <a:buClr>
+                <a:schemeClr val="tx1"/>
+              </a:buClr>
+              <a:buSzPct val="100000"/>
+              <a:buFont typeface="Arial"/>
+              <a:buChar char="•"/>
+              <a:defRPr sz="1600" kern="1200" cap="small">
+                <a:gradFill flip="none" rotWithShape="1">
+                  <a:gsLst>
+                    <a:gs pos="0">
+                      <a:schemeClr val="tx1"/>
+                    </a:gs>
+                    <a:gs pos="100000">
+                      <a:schemeClr val="tx1">
+                        <a:lumMod val="75000"/>
+                      </a:schemeClr>
+                    </a:gs>
+                  </a:gsLst>
+                  <a:lin ang="5580000" scaled="0"/>
+                  <a:tileRect/>
+                </a:gradFill>
+                <a:effectLst>
+                  <a:glow rad="38100">
+                    <a:schemeClr val="bg1">
+                      <a:lumMod val="50000"/>
+                      <a:lumOff val="50000"/>
+                      <a:alpha val="20000"/>
+                    </a:schemeClr>
+                  </a:glow>
+                  <a:outerShdw blurRad="44450" dist="12700" dir="13860000" algn="tl" rotWithShape="0">
+                    <a:srgbClr val="000000">
+                      <a:alpha val="20000"/>
+                    </a:srgbClr>
+                  </a:outerShdw>
+                </a:effectLst>
+                <a:latin typeface="+mn-lt"/>
+                <a:ea typeface="+mn-ea"/>
+                <a:cs typeface="+mn-cs"/>
+              </a:defRPr>
+            </a:lvl3pPr>
+            <a:lvl4pPr marL="1543050" indent="-171450" algn="l" defTabSz="457200" rtl="0" eaLnBrk="1" latinLnBrk="0" hangingPunct="1">
+              <a:spcBef>
+                <a:spcPct val="20000"/>
+              </a:spcBef>
+              <a:spcAft>
+                <a:spcPts val="600"/>
+              </a:spcAft>
+              <a:buClr>
+                <a:schemeClr val="tx1"/>
+              </a:buClr>
+              <a:buSzPct val="100000"/>
+              <a:buFont typeface="Arial"/>
+              <a:buChar char="•"/>
+              <a:defRPr sz="1400" kern="1200" cap="small">
+                <a:gradFill flip="none" rotWithShape="1">
+                  <a:gsLst>
+                    <a:gs pos="0">
+                      <a:schemeClr val="tx1"/>
+                    </a:gs>
+                    <a:gs pos="100000">
+                      <a:schemeClr val="tx1">
+                        <a:lumMod val="75000"/>
+                      </a:schemeClr>
+                    </a:gs>
+                  </a:gsLst>
+                  <a:lin ang="5580000" scaled="0"/>
+                  <a:tileRect/>
+                </a:gradFill>
+                <a:effectLst>
+                  <a:glow rad="38100">
+                    <a:schemeClr val="bg1">
+                      <a:lumMod val="50000"/>
+                      <a:lumOff val="50000"/>
+                      <a:alpha val="20000"/>
+                    </a:schemeClr>
+                  </a:glow>
+                  <a:outerShdw blurRad="44450" dist="12700" dir="13860000" algn="tl" rotWithShape="0">
+                    <a:srgbClr val="000000">
+                      <a:alpha val="20000"/>
+                    </a:srgbClr>
+                  </a:outerShdw>
+                </a:effectLst>
+                <a:latin typeface="+mn-lt"/>
+                <a:ea typeface="+mn-ea"/>
+                <a:cs typeface="+mn-cs"/>
+              </a:defRPr>
+            </a:lvl4pPr>
+            <a:lvl5pPr marL="2000250" indent="-171450" algn="l" defTabSz="457200" rtl="0" eaLnBrk="1" latinLnBrk="0" hangingPunct="1">
+              <a:spcBef>
+                <a:spcPct val="20000"/>
+              </a:spcBef>
+              <a:spcAft>
+                <a:spcPts val="600"/>
+              </a:spcAft>
+              <a:buClr>
+                <a:schemeClr val="tx1"/>
+              </a:buClr>
+              <a:buSzPct val="100000"/>
+              <a:buFont typeface="Arial"/>
+              <a:buChar char="•"/>
+              <a:defRPr sz="1400" kern="1200" cap="small">
+                <a:gradFill flip="none" rotWithShape="1">
+                  <a:gsLst>
+                    <a:gs pos="0">
+                      <a:schemeClr val="tx1"/>
+                    </a:gs>
+                    <a:gs pos="100000">
+                      <a:schemeClr val="tx1">
+                        <a:lumMod val="75000"/>
+                      </a:schemeClr>
+                    </a:gs>
+                  </a:gsLst>
+                  <a:lin ang="5580000" scaled="0"/>
+                  <a:tileRect/>
+                </a:gradFill>
+                <a:effectLst>
+                  <a:glow rad="38100">
+                    <a:schemeClr val="bg1">
+                      <a:lumMod val="50000"/>
+                      <a:lumOff val="50000"/>
+                      <a:alpha val="20000"/>
+                    </a:schemeClr>
+                  </a:glow>
+                  <a:outerShdw blurRad="44450" dist="12700" dir="13860000" algn="tl" rotWithShape="0">
+                    <a:srgbClr val="000000">
+                      <a:alpha val="20000"/>
+                    </a:srgbClr>
+                  </a:outerShdw>
+                </a:effectLst>
+                <a:latin typeface="+mn-lt"/>
+                <a:ea typeface="+mn-ea"/>
+                <a:cs typeface="+mn-cs"/>
+              </a:defRPr>
+            </a:lvl5pPr>
+            <a:lvl6pPr marL="2514600" indent="-228600" algn="l" defTabSz="457200" rtl="0" eaLnBrk="1" latinLnBrk="0" hangingPunct="1">
+              <a:spcBef>
+                <a:spcPct val="20000"/>
+              </a:spcBef>
+              <a:spcAft>
+                <a:spcPts val="600"/>
+              </a:spcAft>
+              <a:buClr>
+                <a:schemeClr val="tx1"/>
+              </a:buClr>
+              <a:buSzPct val="100000"/>
+              <a:buFont typeface="Arial"/>
+              <a:buChar char="•"/>
+              <a:defRPr sz="1200" kern="1200" cap="small">
+                <a:gradFill flip="none" rotWithShape="1">
+                  <a:gsLst>
+                    <a:gs pos="0">
+                      <a:schemeClr val="tx1"/>
+                    </a:gs>
+                    <a:gs pos="100000">
+                      <a:schemeClr val="tx1">
+                        <a:lumMod val="75000"/>
+                      </a:schemeClr>
+                    </a:gs>
+                  </a:gsLst>
+                  <a:lin ang="5580000" scaled="0"/>
+                  <a:tileRect/>
+                </a:gradFill>
+                <a:effectLst>
+                  <a:glow rad="38100">
+                    <a:schemeClr val="bg1">
+                      <a:lumMod val="50000"/>
+                      <a:lumOff val="50000"/>
+                      <a:alpha val="20000"/>
+                    </a:schemeClr>
+                  </a:glow>
+                  <a:outerShdw blurRad="44450" dist="12700" dir="13860000" algn="tl" rotWithShape="0">
+                    <a:srgbClr val="000000">
+                      <a:alpha val="20000"/>
+                    </a:srgbClr>
+                  </a:outerShdw>
+                </a:effectLst>
+                <a:latin typeface="+mn-lt"/>
+                <a:ea typeface="+mn-ea"/>
+                <a:cs typeface="+mn-cs"/>
+              </a:defRPr>
+            </a:lvl6pPr>
+            <a:lvl7pPr marL="2971800" indent="-228600" algn="l" defTabSz="457200" rtl="0" eaLnBrk="1" latinLnBrk="0" hangingPunct="1">
+              <a:spcBef>
+                <a:spcPct val="20000"/>
+              </a:spcBef>
+              <a:spcAft>
+                <a:spcPts val="600"/>
+              </a:spcAft>
+              <a:buClr>
+                <a:schemeClr val="tx1"/>
+              </a:buClr>
+              <a:buSzPct val="100000"/>
+              <a:buFont typeface="Arial"/>
+              <a:buChar char="•"/>
+              <a:defRPr sz="1200" kern="1200" cap="small">
+                <a:gradFill flip="none" rotWithShape="1">
+                  <a:gsLst>
+                    <a:gs pos="0">
+                      <a:schemeClr val="tx1"/>
+                    </a:gs>
+                    <a:gs pos="100000">
+                      <a:schemeClr val="tx1">
+                        <a:lumMod val="75000"/>
+                      </a:schemeClr>
+                    </a:gs>
+                  </a:gsLst>
+                  <a:lin ang="5580000" scaled="0"/>
+                  <a:tileRect/>
+                </a:gradFill>
+                <a:effectLst>
+                  <a:glow rad="38100">
+                    <a:schemeClr val="bg1">
+                      <a:lumMod val="50000"/>
+                      <a:lumOff val="50000"/>
+                      <a:alpha val="20000"/>
+                    </a:schemeClr>
+                  </a:glow>
+                  <a:outerShdw blurRad="44450" dist="12700" dir="13860000" algn="tl" rotWithShape="0">
+                    <a:srgbClr val="000000">
+                      <a:alpha val="20000"/>
+                    </a:srgbClr>
+                  </a:outerShdw>
+                </a:effectLst>
+                <a:latin typeface="+mn-lt"/>
+                <a:ea typeface="+mn-ea"/>
+                <a:cs typeface="+mn-cs"/>
+              </a:defRPr>
+            </a:lvl7pPr>
+            <a:lvl8pPr marL="3429000" indent="-228600" algn="l" defTabSz="457200" rtl="0" eaLnBrk="1" latinLnBrk="0" hangingPunct="1">
+              <a:spcBef>
+                <a:spcPct val="20000"/>
+              </a:spcBef>
+              <a:spcAft>
+                <a:spcPts val="600"/>
+              </a:spcAft>
+              <a:buClr>
+                <a:schemeClr val="tx1"/>
+              </a:buClr>
+              <a:buSzPct val="100000"/>
+              <a:buFont typeface="Arial"/>
+              <a:buChar char="•"/>
+              <a:defRPr sz="1200" kern="1200" cap="small">
+                <a:gradFill flip="none" rotWithShape="1">
+                  <a:gsLst>
+                    <a:gs pos="0">
+                      <a:schemeClr val="tx1"/>
+                    </a:gs>
+                    <a:gs pos="100000">
+                      <a:schemeClr val="tx1">
+                        <a:lumMod val="75000"/>
+                      </a:schemeClr>
+                    </a:gs>
+                  </a:gsLst>
+                  <a:lin ang="5580000" scaled="0"/>
+                  <a:tileRect/>
+                </a:gradFill>
+                <a:effectLst>
+                  <a:glow rad="38100">
+                    <a:schemeClr val="bg1">
+                      <a:lumMod val="50000"/>
+                      <a:lumOff val="50000"/>
+                      <a:alpha val="20000"/>
+                    </a:schemeClr>
+                  </a:glow>
+                  <a:outerShdw blurRad="44450" dist="12700" dir="13860000" algn="tl" rotWithShape="0">
+                    <a:srgbClr val="000000">
+                      <a:alpha val="20000"/>
+                    </a:srgbClr>
+                  </a:outerShdw>
+                </a:effectLst>
+                <a:latin typeface="+mn-lt"/>
+                <a:ea typeface="+mn-ea"/>
+                <a:cs typeface="+mn-cs"/>
+              </a:defRPr>
+            </a:lvl8pPr>
+            <a:lvl9pPr marL="3886200" indent="-228600" algn="l" defTabSz="457200" rtl="0" eaLnBrk="1" latinLnBrk="0" hangingPunct="1">
+              <a:spcBef>
+                <a:spcPct val="20000"/>
+              </a:spcBef>
+              <a:spcAft>
+                <a:spcPts val="600"/>
+              </a:spcAft>
+              <a:buClr>
+                <a:schemeClr val="tx1"/>
+              </a:buClr>
+              <a:buSzPct val="100000"/>
+              <a:buFont typeface="Arial"/>
+              <a:buChar char="•"/>
+              <a:defRPr sz="1200" kern="1200" cap="small">
+                <a:gradFill flip="none" rotWithShape="1">
+                  <a:gsLst>
+                    <a:gs pos="0">
+                      <a:schemeClr val="tx1"/>
+                    </a:gs>
+                    <a:gs pos="100000">
+                      <a:schemeClr val="tx1">
+                        <a:lumMod val="75000"/>
+                      </a:schemeClr>
+                    </a:gs>
+                  </a:gsLst>
+                  <a:lin ang="5580000" scaled="0"/>
+                  <a:tileRect/>
+                </a:gradFill>
+                <a:effectLst>
+                  <a:glow rad="38100">
+                    <a:schemeClr val="bg1">
+                      <a:lumMod val="50000"/>
+                      <a:lumOff val="50000"/>
+                      <a:alpha val="20000"/>
+                    </a:schemeClr>
+                  </a:glow>
+                  <a:outerShdw blurRad="44450" dist="12700" dir="13860000" algn="tl" rotWithShape="0">
+                    <a:srgbClr val="000000">
+                      <a:alpha val="20000"/>
+                    </a:srgbClr>
+                  </a:outerShdw>
+                </a:effectLst>
+                <a:latin typeface="+mn-lt"/>
+                <a:ea typeface="+mn-ea"/>
+                <a:cs typeface="+mn-cs"/>
+              </a:defRPr>
+            </a:lvl9pPr>
+          </a:lstStyle>
+          <a:p>
+            <a:pPr marL="0" indent="0" algn="ctr">
+              <a:buFont typeface="Arial"/>
+              <a:buNone/>
+            </a:pPr>
+            <a:r>
+              <a:rPr lang="es-CO" sz="1600" b="1" cap="none" dirty="0">
+                <a:solidFill>
+                  <a:srgbClr val="ACA9A7"/>
+                </a:solidFill>
+                <a:effectLst/>
+              </a:rPr>
+              <a:t>Manuales de operación</a:t>
+            </a:r>
+          </a:p>
+          <a:p>
+            <a:pPr marL="0" indent="0" algn="ctr">
+              <a:buFont typeface="Arial"/>
+              <a:buNone/>
+            </a:pPr>
+            <a:r>
+              <a:rPr lang="es-MX" sz="1400" b="1" cap="none" dirty="0">
+                <a:solidFill>
+                  <a:srgbClr val="797C75"/>
+                </a:solidFill>
+                <a:effectLst/>
+              </a:rPr>
+              <a:t>Guías paso a paso. Lenguaje simple.</a:t>
+            </a:r>
+            <a:endParaRPr lang="es-CO" sz="1200" cap="none" dirty="0">
+              <a:solidFill>
+                <a:srgbClr val="797C75"/>
+              </a:solidFill>
+              <a:effectLst/>
+            </a:endParaRPr>
+          </a:p>
+        </p:txBody>
+      </p:sp>
+      <p:sp>
+        <p:nvSpPr>
+          <p:cNvPr id="10" name="Marcador de contenido 2">
+            <a:extLst>
+              <a:ext uri="{FF2B5EF4-FFF2-40B4-BE49-F238E27FC236}">
+                <a16:creationId xmlns:a16="http://schemas.microsoft.com/office/drawing/2014/main" id="{C660FB43-3179-D9ED-3A1E-B3A752BBCF38}"/>
+              </a:ext>
+            </a:extLst>
+          </p:cNvPr>
+          <p:cNvSpPr txBox="1">
+            <a:spLocks/>
+          </p:cNvSpPr>
+          <p:nvPr/>
+        </p:nvSpPr>
+        <p:spPr>
+          <a:xfrm>
+            <a:off x="6096000" y="2196173"/>
+            <a:ext cx="4737939" cy="1298448"/>
+          </a:xfrm>
+          <a:prstGeom prst="roundRect">
+            <a:avLst/>
+          </a:prstGeom>
+          <a:solidFill>
+            <a:srgbClr val="252E3C"/>
+          </a:solidFill>
+          <a:ln>
+            <a:solidFill>
+              <a:srgbClr val="343A3E"/>
+            </a:solidFill>
+          </a:ln>
+        </p:spPr>
+        <p:txBody>
+          <a:bodyPr vert="horz" lIns="91440" tIns="45720" rIns="91440" bIns="45720" rtlCol="0" anchor="ctr">
+            <a:normAutofit/>
+          </a:bodyPr>
+          <a:lstStyle>
+            <a:lvl1pPr marL="285750" indent="-285750" algn="l" defTabSz="457200" rtl="0" eaLnBrk="1" latinLnBrk="0" hangingPunct="1">
+              <a:spcBef>
+                <a:spcPct val="20000"/>
+              </a:spcBef>
+              <a:spcAft>
+                <a:spcPts val="600"/>
+              </a:spcAft>
+              <a:buClr>
+                <a:schemeClr val="tx1"/>
+              </a:buClr>
+              <a:buSzPct val="100000"/>
+              <a:buFont typeface="Arial"/>
+              <a:buChar char="•"/>
+              <a:defRPr sz="2000" kern="1200" cap="small">
+                <a:gradFill flip="none" rotWithShape="1">
+                  <a:gsLst>
+                    <a:gs pos="0">
+                      <a:schemeClr val="tx1"/>
+                    </a:gs>
+                    <a:gs pos="100000">
+                      <a:schemeClr val="tx1">
+                        <a:lumMod val="75000"/>
+                      </a:schemeClr>
+                    </a:gs>
+                  </a:gsLst>
+                  <a:lin ang="5580000" scaled="0"/>
+                  <a:tileRect/>
+                </a:gradFill>
+                <a:effectLst>
+                  <a:glow rad="38100">
+                    <a:schemeClr val="bg1">
+                      <a:lumMod val="50000"/>
+                      <a:lumOff val="50000"/>
+                      <a:alpha val="20000"/>
+                    </a:schemeClr>
+                  </a:glow>
+                  <a:outerShdw blurRad="44450" dist="12700" dir="13860000" algn="tl" rotWithShape="0">
+                    <a:srgbClr val="000000">
+                      <a:alpha val="20000"/>
+                    </a:srgbClr>
+                  </a:outerShdw>
+                </a:effectLst>
+                <a:latin typeface="+mn-lt"/>
+                <a:ea typeface="+mn-ea"/>
+                <a:cs typeface="+mn-cs"/>
+              </a:defRPr>
+            </a:lvl1pPr>
+            <a:lvl2pPr marL="742950" indent="-285750" algn="l" defTabSz="457200" rtl="0" eaLnBrk="1" latinLnBrk="0" hangingPunct="1">
+              <a:spcBef>
+                <a:spcPct val="20000"/>
+              </a:spcBef>
+              <a:spcAft>
+                <a:spcPts val="600"/>
+              </a:spcAft>
+              <a:buClr>
+                <a:schemeClr val="tx1"/>
+              </a:buClr>
+              <a:buSzPct val="100000"/>
+              <a:buFont typeface="Arial"/>
+              <a:buChar char="•"/>
+              <a:defRPr sz="1800" kern="1200" cap="small">
+                <a:gradFill flip="none" rotWithShape="1">
+                  <a:gsLst>
+                    <a:gs pos="0">
+                      <a:schemeClr val="tx1"/>
+                    </a:gs>
+                    <a:gs pos="100000">
+                      <a:schemeClr val="tx1">
+                        <a:lumMod val="75000"/>
+                      </a:schemeClr>
+                    </a:gs>
+                  </a:gsLst>
+                  <a:lin ang="5580000" scaled="0"/>
+                  <a:tileRect/>
+                </a:gradFill>
+                <a:effectLst>
+                  <a:glow rad="38100">
+                    <a:schemeClr val="bg1">
+                      <a:lumMod val="50000"/>
+                      <a:lumOff val="50000"/>
+                      <a:alpha val="20000"/>
+                    </a:schemeClr>
+                  </a:glow>
+                  <a:outerShdw blurRad="44450" dist="12700" dir="13860000" algn="tl" rotWithShape="0">
+                    <a:srgbClr val="000000">
+                      <a:alpha val="20000"/>
+                    </a:srgbClr>
+                  </a:outerShdw>
+                </a:effectLst>
+                <a:latin typeface="+mn-lt"/>
+                <a:ea typeface="+mn-ea"/>
+                <a:cs typeface="+mn-cs"/>
+              </a:defRPr>
+            </a:lvl2pPr>
+            <a:lvl3pPr marL="1200150" indent="-285750" algn="l" defTabSz="457200" rtl="0" eaLnBrk="1" latinLnBrk="0" hangingPunct="1">
+              <a:spcBef>
+                <a:spcPct val="20000"/>
+              </a:spcBef>
+              <a:spcAft>
+                <a:spcPts val="600"/>
+              </a:spcAft>
+              <a:buClr>
+                <a:schemeClr val="tx1"/>
+              </a:buClr>
+              <a:buSzPct val="100000"/>
+              <a:buFont typeface="Arial"/>
+              <a:buChar char="•"/>
+              <a:defRPr sz="1600" kern="1200" cap="small">
+                <a:gradFill flip="none" rotWithShape="1">
+                  <a:gsLst>
+                    <a:gs pos="0">
+                      <a:schemeClr val="tx1"/>
+                    </a:gs>
+                    <a:gs pos="100000">
+                      <a:schemeClr val="tx1">
+                        <a:lumMod val="75000"/>
+                      </a:schemeClr>
+                    </a:gs>
+                  </a:gsLst>
+                  <a:lin ang="5580000" scaled="0"/>
+                  <a:tileRect/>
+                </a:gradFill>
+                <a:effectLst>
+                  <a:glow rad="38100">
+                    <a:schemeClr val="bg1">
+                      <a:lumMod val="50000"/>
+                      <a:lumOff val="50000"/>
+                      <a:alpha val="20000"/>
+                    </a:schemeClr>
+                  </a:glow>
+                  <a:outerShdw blurRad="44450" dist="12700" dir="13860000" algn="tl" rotWithShape="0">
+                    <a:srgbClr val="000000">
+                      <a:alpha val="20000"/>
+                    </a:srgbClr>
+                  </a:outerShdw>
+                </a:effectLst>
+                <a:latin typeface="+mn-lt"/>
+                <a:ea typeface="+mn-ea"/>
+                <a:cs typeface="+mn-cs"/>
+              </a:defRPr>
+            </a:lvl3pPr>
+            <a:lvl4pPr marL="1543050" indent="-171450" algn="l" defTabSz="457200" rtl="0" eaLnBrk="1" latinLnBrk="0" hangingPunct="1">
+              <a:spcBef>
+                <a:spcPct val="20000"/>
+              </a:spcBef>
+              <a:spcAft>
+                <a:spcPts val="600"/>
+              </a:spcAft>
+              <a:buClr>
+                <a:schemeClr val="tx1"/>
+              </a:buClr>
+              <a:buSzPct val="100000"/>
+              <a:buFont typeface="Arial"/>
+              <a:buChar char="•"/>
+              <a:defRPr sz="1400" kern="1200" cap="small">
+                <a:gradFill flip="none" rotWithShape="1">
+                  <a:gsLst>
+                    <a:gs pos="0">
+                      <a:schemeClr val="tx1"/>
+                    </a:gs>
+                    <a:gs pos="100000">
+                      <a:schemeClr val="tx1">
+                        <a:lumMod val="75000"/>
+                      </a:schemeClr>
+                    </a:gs>
+                  </a:gsLst>
+                  <a:lin ang="5580000" scaled="0"/>
+                  <a:tileRect/>
+                </a:gradFill>
+                <a:effectLst>
+                  <a:glow rad="38100">
+                    <a:schemeClr val="bg1">
+                      <a:lumMod val="50000"/>
+                      <a:lumOff val="50000"/>
+                      <a:alpha val="20000"/>
+                    </a:schemeClr>
+                  </a:glow>
+                  <a:outerShdw blurRad="44450" dist="12700" dir="13860000" algn="tl" rotWithShape="0">
+                    <a:srgbClr val="000000">
+                      <a:alpha val="20000"/>
+                    </a:srgbClr>
+                  </a:outerShdw>
+                </a:effectLst>
+                <a:latin typeface="+mn-lt"/>
+                <a:ea typeface="+mn-ea"/>
+                <a:cs typeface="+mn-cs"/>
+              </a:defRPr>
+            </a:lvl4pPr>
+            <a:lvl5pPr marL="2000250" indent="-171450" algn="l" defTabSz="457200" rtl="0" eaLnBrk="1" latinLnBrk="0" hangingPunct="1">
+              <a:spcBef>
+                <a:spcPct val="20000"/>
+              </a:spcBef>
+              <a:spcAft>
+                <a:spcPts val="600"/>
+              </a:spcAft>
+              <a:buClr>
+                <a:schemeClr val="tx1"/>
+              </a:buClr>
+              <a:buSzPct val="100000"/>
+              <a:buFont typeface="Arial"/>
+              <a:buChar char="•"/>
+              <a:defRPr sz="1400" kern="1200" cap="small">
+                <a:gradFill flip="none" rotWithShape="1">
+                  <a:gsLst>
+                    <a:gs pos="0">
+                      <a:schemeClr val="tx1"/>
+                    </a:gs>
+                    <a:gs pos="100000">
+                      <a:schemeClr val="tx1">
+                        <a:lumMod val="75000"/>
+                      </a:schemeClr>
+                    </a:gs>
+                  </a:gsLst>
+                  <a:lin ang="5580000" scaled="0"/>
+                  <a:tileRect/>
+                </a:gradFill>
+                <a:effectLst>
+                  <a:glow rad="38100">
+                    <a:schemeClr val="bg1">
+                      <a:lumMod val="50000"/>
+                      <a:lumOff val="50000"/>
+                      <a:alpha val="20000"/>
+                    </a:schemeClr>
+                  </a:glow>
+                  <a:outerShdw blurRad="44450" dist="12700" dir="13860000" algn="tl" rotWithShape="0">
+                    <a:srgbClr val="000000">
+                      <a:alpha val="20000"/>
+                    </a:srgbClr>
+                  </a:outerShdw>
+                </a:effectLst>
+                <a:latin typeface="+mn-lt"/>
+                <a:ea typeface="+mn-ea"/>
+                <a:cs typeface="+mn-cs"/>
+              </a:defRPr>
+            </a:lvl5pPr>
+            <a:lvl6pPr marL="2514600" indent="-228600" algn="l" defTabSz="457200" rtl="0" eaLnBrk="1" latinLnBrk="0" hangingPunct="1">
+              <a:spcBef>
+                <a:spcPct val="20000"/>
+              </a:spcBef>
+              <a:spcAft>
+                <a:spcPts val="600"/>
+              </a:spcAft>
+              <a:buClr>
+                <a:schemeClr val="tx1"/>
+              </a:buClr>
+              <a:buSzPct val="100000"/>
+              <a:buFont typeface="Arial"/>
+              <a:buChar char="•"/>
+              <a:defRPr sz="1200" kern="1200" cap="small">
+                <a:gradFill flip="none" rotWithShape="1">
+                  <a:gsLst>
+                    <a:gs pos="0">
+                      <a:schemeClr val="tx1"/>
+                    </a:gs>
+                    <a:gs pos="100000">
+                      <a:schemeClr val="tx1">
+                        <a:lumMod val="75000"/>
+                      </a:schemeClr>
+                    </a:gs>
+                  </a:gsLst>
+                  <a:lin ang="5580000" scaled="0"/>
+                  <a:tileRect/>
+                </a:gradFill>
+                <a:effectLst>
+                  <a:glow rad="38100">
+                    <a:schemeClr val="bg1">
+                      <a:lumMod val="50000"/>
+                      <a:lumOff val="50000"/>
+                      <a:alpha val="20000"/>
+                    </a:schemeClr>
+                  </a:glow>
+                  <a:outerShdw blurRad="44450" dist="12700" dir="13860000" algn="tl" rotWithShape="0">
+                    <a:srgbClr val="000000">
+                      <a:alpha val="20000"/>
+                    </a:srgbClr>
+                  </a:outerShdw>
+                </a:effectLst>
+                <a:latin typeface="+mn-lt"/>
+                <a:ea typeface="+mn-ea"/>
+                <a:cs typeface="+mn-cs"/>
+              </a:defRPr>
+            </a:lvl6pPr>
+            <a:lvl7pPr marL="2971800" indent="-228600" algn="l" defTabSz="457200" rtl="0" eaLnBrk="1" latinLnBrk="0" hangingPunct="1">
+              <a:spcBef>
+                <a:spcPct val="20000"/>
+              </a:spcBef>
+              <a:spcAft>
+                <a:spcPts val="600"/>
+              </a:spcAft>
+              <a:buClr>
+                <a:schemeClr val="tx1"/>
+              </a:buClr>
+              <a:buSzPct val="100000"/>
+              <a:buFont typeface="Arial"/>
+              <a:buChar char="•"/>
+              <a:defRPr sz="1200" kern="1200" cap="small">
+                <a:gradFill flip="none" rotWithShape="1">
+                  <a:gsLst>
+                    <a:gs pos="0">
+                      <a:schemeClr val="tx1"/>
+                    </a:gs>
+                    <a:gs pos="100000">
+                      <a:schemeClr val="tx1">
+                        <a:lumMod val="75000"/>
+                      </a:schemeClr>
+                    </a:gs>
+                  </a:gsLst>
+                  <a:lin ang="5580000" scaled="0"/>
+                  <a:tileRect/>
+                </a:gradFill>
+                <a:effectLst>
+                  <a:glow rad="38100">
+                    <a:schemeClr val="bg1">
+                      <a:lumMod val="50000"/>
+                      <a:lumOff val="50000"/>
+                      <a:alpha val="20000"/>
+                    </a:schemeClr>
+                  </a:glow>
+                  <a:outerShdw blurRad="44450" dist="12700" dir="13860000" algn="tl" rotWithShape="0">
+                    <a:srgbClr val="000000">
+                      <a:alpha val="20000"/>
+                    </a:srgbClr>
+                  </a:outerShdw>
+                </a:effectLst>
+                <a:latin typeface="+mn-lt"/>
+                <a:ea typeface="+mn-ea"/>
+                <a:cs typeface="+mn-cs"/>
+              </a:defRPr>
+            </a:lvl7pPr>
+            <a:lvl8pPr marL="3429000" indent="-228600" algn="l" defTabSz="457200" rtl="0" eaLnBrk="1" latinLnBrk="0" hangingPunct="1">
+              <a:spcBef>
+                <a:spcPct val="20000"/>
+              </a:spcBef>
+              <a:spcAft>
+                <a:spcPts val="600"/>
+              </a:spcAft>
+              <a:buClr>
+                <a:schemeClr val="tx1"/>
+              </a:buClr>
+              <a:buSzPct val="100000"/>
+              <a:buFont typeface="Arial"/>
+              <a:buChar char="•"/>
+              <a:defRPr sz="1200" kern="1200" cap="small">
+                <a:gradFill flip="none" rotWithShape="1">
+                  <a:gsLst>
+                    <a:gs pos="0">
+                      <a:schemeClr val="tx1"/>
+                    </a:gs>
+                    <a:gs pos="100000">
+                      <a:schemeClr val="tx1">
+                        <a:lumMod val="75000"/>
+                      </a:schemeClr>
+                    </a:gs>
+                  </a:gsLst>
+                  <a:lin ang="5580000" scaled="0"/>
+                  <a:tileRect/>
+                </a:gradFill>
+                <a:effectLst>
+                  <a:glow rad="38100">
+                    <a:schemeClr val="bg1">
+                      <a:lumMod val="50000"/>
+                      <a:lumOff val="50000"/>
+                      <a:alpha val="20000"/>
+                    </a:schemeClr>
+                  </a:glow>
+                  <a:outerShdw blurRad="44450" dist="12700" dir="13860000" algn="tl" rotWithShape="0">
+                    <a:srgbClr val="000000">
+                      <a:alpha val="20000"/>
+                    </a:srgbClr>
+                  </a:outerShdw>
+                </a:effectLst>
+                <a:latin typeface="+mn-lt"/>
+                <a:ea typeface="+mn-ea"/>
+                <a:cs typeface="+mn-cs"/>
+              </a:defRPr>
+            </a:lvl8pPr>
+            <a:lvl9pPr marL="3886200" indent="-228600" algn="l" defTabSz="457200" rtl="0" eaLnBrk="1" latinLnBrk="0" hangingPunct="1">
+              <a:spcBef>
+                <a:spcPct val="20000"/>
+              </a:spcBef>
+              <a:spcAft>
+                <a:spcPts val="600"/>
+              </a:spcAft>
+              <a:buClr>
+                <a:schemeClr val="tx1"/>
+              </a:buClr>
+              <a:buSzPct val="100000"/>
+              <a:buFont typeface="Arial"/>
+              <a:buChar char="•"/>
+              <a:defRPr sz="1200" kern="1200" cap="small">
+                <a:gradFill flip="none" rotWithShape="1">
+                  <a:gsLst>
+                    <a:gs pos="0">
+                      <a:schemeClr val="tx1"/>
+                    </a:gs>
+                    <a:gs pos="100000">
+                      <a:schemeClr val="tx1">
+                        <a:lumMod val="75000"/>
+                      </a:schemeClr>
+                    </a:gs>
+                  </a:gsLst>
+                  <a:lin ang="5580000" scaled="0"/>
+                  <a:tileRect/>
+                </a:gradFill>
+                <a:effectLst>
+                  <a:glow rad="38100">
+                    <a:schemeClr val="bg1">
+                      <a:lumMod val="50000"/>
+                      <a:lumOff val="50000"/>
+                      <a:alpha val="20000"/>
+                    </a:schemeClr>
+                  </a:glow>
+                  <a:outerShdw blurRad="44450" dist="12700" dir="13860000" algn="tl" rotWithShape="0">
+                    <a:srgbClr val="000000">
+                      <a:alpha val="20000"/>
+                    </a:srgbClr>
+                  </a:outerShdw>
+                </a:effectLst>
+                <a:latin typeface="+mn-lt"/>
+                <a:ea typeface="+mn-ea"/>
+                <a:cs typeface="+mn-cs"/>
+              </a:defRPr>
+            </a:lvl9pPr>
+          </a:lstStyle>
+          <a:p>
+            <a:pPr marL="0" indent="0" algn="ctr">
+              <a:buFont typeface="Arial"/>
+              <a:buNone/>
+            </a:pPr>
+            <a:r>
+              <a:rPr lang="es-CO" sz="1600" b="1" cap="none" dirty="0">
+                <a:solidFill>
+                  <a:srgbClr val="ACA9A7"/>
+                </a:solidFill>
+                <a:effectLst/>
+              </a:rPr>
+              <a:t>Planos de arquitectura</a:t>
+            </a:r>
+          </a:p>
+          <a:p>
+            <a:pPr marL="0" indent="0" algn="ctr">
+              <a:buFont typeface="Arial"/>
+              <a:buNone/>
+            </a:pPr>
+            <a:r>
+              <a:rPr lang="es-MX" sz="1400" b="1" cap="none" dirty="0">
+                <a:solidFill>
+                  <a:srgbClr val="797C75"/>
+                </a:solidFill>
+                <a:effectLst/>
+              </a:rPr>
+              <a:t>Diagramas del sistema completo.</a:t>
+            </a:r>
+            <a:endParaRPr lang="es-CO" sz="1200" cap="none" dirty="0">
+              <a:solidFill>
+                <a:srgbClr val="797C75"/>
+              </a:solidFill>
+              <a:effectLst/>
+            </a:endParaRPr>
+          </a:p>
+        </p:txBody>
+      </p:sp>
+      <p:sp>
+        <p:nvSpPr>
+          <p:cNvPr id="11" name="Marcador de contenido 2">
+            <a:extLst>
+              <a:ext uri="{FF2B5EF4-FFF2-40B4-BE49-F238E27FC236}">
+                <a16:creationId xmlns:a16="http://schemas.microsoft.com/office/drawing/2014/main" id="{1405DA33-858F-3665-E404-E164FDC44875}"/>
+              </a:ext>
+            </a:extLst>
+          </p:cNvPr>
+          <p:cNvSpPr txBox="1">
+            <a:spLocks/>
+          </p:cNvSpPr>
+          <p:nvPr/>
+        </p:nvSpPr>
+        <p:spPr>
+          <a:xfrm>
+            <a:off x="3575304" y="3906104"/>
+            <a:ext cx="4737939" cy="1298448"/>
+          </a:xfrm>
+          <a:prstGeom prst="roundRect">
+            <a:avLst/>
+          </a:prstGeom>
+          <a:solidFill>
+            <a:srgbClr val="252E3C"/>
+          </a:solidFill>
+          <a:ln>
+            <a:solidFill>
+              <a:srgbClr val="343A3E"/>
+            </a:solidFill>
+          </a:ln>
+        </p:spPr>
+        <p:txBody>
+          <a:bodyPr vert="horz" lIns="91440" tIns="45720" rIns="91440" bIns="45720" rtlCol="0" anchor="ctr">
+            <a:normAutofit/>
+          </a:bodyPr>
+          <a:lstStyle>
+            <a:lvl1pPr marL="285750" indent="-285750" algn="l" defTabSz="457200" rtl="0" eaLnBrk="1" latinLnBrk="0" hangingPunct="1">
+              <a:spcBef>
+                <a:spcPct val="20000"/>
+              </a:spcBef>
+              <a:spcAft>
+                <a:spcPts val="600"/>
+              </a:spcAft>
+              <a:buClr>
+                <a:schemeClr val="tx1"/>
+              </a:buClr>
+              <a:buSzPct val="100000"/>
+              <a:buFont typeface="Arial"/>
+              <a:buChar char="•"/>
+              <a:defRPr sz="2000" kern="1200" cap="small">
+                <a:gradFill flip="none" rotWithShape="1">
+                  <a:gsLst>
+                    <a:gs pos="0">
+                      <a:schemeClr val="tx1"/>
+                    </a:gs>
+                    <a:gs pos="100000">
+                      <a:schemeClr val="tx1">
+                        <a:lumMod val="75000"/>
+                      </a:schemeClr>
+                    </a:gs>
+                  </a:gsLst>
+                  <a:lin ang="5580000" scaled="0"/>
+                  <a:tileRect/>
+                </a:gradFill>
+                <a:effectLst>
+                  <a:glow rad="38100">
+                    <a:schemeClr val="bg1">
+                      <a:lumMod val="50000"/>
+                      <a:lumOff val="50000"/>
+                      <a:alpha val="20000"/>
+                    </a:schemeClr>
+                  </a:glow>
+                  <a:outerShdw blurRad="44450" dist="12700" dir="13860000" algn="tl" rotWithShape="0">
+                    <a:srgbClr val="000000">
+                      <a:alpha val="20000"/>
+                    </a:srgbClr>
+                  </a:outerShdw>
+                </a:effectLst>
+                <a:latin typeface="+mn-lt"/>
+                <a:ea typeface="+mn-ea"/>
+                <a:cs typeface="+mn-cs"/>
+              </a:defRPr>
+            </a:lvl1pPr>
+            <a:lvl2pPr marL="742950" indent="-285750" algn="l" defTabSz="457200" rtl="0" eaLnBrk="1" latinLnBrk="0" hangingPunct="1">
+              <a:spcBef>
+                <a:spcPct val="20000"/>
+              </a:spcBef>
+              <a:spcAft>
+                <a:spcPts val="600"/>
+              </a:spcAft>
+              <a:buClr>
+                <a:schemeClr val="tx1"/>
+              </a:buClr>
+              <a:buSzPct val="100000"/>
+              <a:buFont typeface="Arial"/>
+              <a:buChar char="•"/>
+              <a:defRPr sz="1800" kern="1200" cap="small">
+                <a:gradFill flip="none" rotWithShape="1">
+                  <a:gsLst>
+                    <a:gs pos="0">
+                      <a:schemeClr val="tx1"/>
+                    </a:gs>
+                    <a:gs pos="100000">
+                      <a:schemeClr val="tx1">
+                        <a:lumMod val="75000"/>
+                      </a:schemeClr>
+                    </a:gs>
+                  </a:gsLst>
+                  <a:lin ang="5580000" scaled="0"/>
+                  <a:tileRect/>
+                </a:gradFill>
+                <a:effectLst>
+                  <a:glow rad="38100">
+                    <a:schemeClr val="bg1">
+                      <a:lumMod val="50000"/>
+                      <a:lumOff val="50000"/>
+                      <a:alpha val="20000"/>
+                    </a:schemeClr>
+                  </a:glow>
+                  <a:outerShdw blurRad="44450" dist="12700" dir="13860000" algn="tl" rotWithShape="0">
+                    <a:srgbClr val="000000">
+                      <a:alpha val="20000"/>
+                    </a:srgbClr>
+                  </a:outerShdw>
+                </a:effectLst>
+                <a:latin typeface="+mn-lt"/>
+                <a:ea typeface="+mn-ea"/>
+                <a:cs typeface="+mn-cs"/>
+              </a:defRPr>
+            </a:lvl2pPr>
+            <a:lvl3pPr marL="1200150" indent="-285750" algn="l" defTabSz="457200" rtl="0" eaLnBrk="1" latinLnBrk="0" hangingPunct="1">
+              <a:spcBef>
+                <a:spcPct val="20000"/>
+              </a:spcBef>
+              <a:spcAft>
+                <a:spcPts val="600"/>
+              </a:spcAft>
+              <a:buClr>
+                <a:schemeClr val="tx1"/>
+              </a:buClr>
+              <a:buSzPct val="100000"/>
+              <a:buFont typeface="Arial"/>
+              <a:buChar char="•"/>
+              <a:defRPr sz="1600" kern="1200" cap="small">
+                <a:gradFill flip="none" rotWithShape="1">
+                  <a:gsLst>
+                    <a:gs pos="0">
+                      <a:schemeClr val="tx1"/>
+                    </a:gs>
+                    <a:gs pos="100000">
+                      <a:schemeClr val="tx1">
+                        <a:lumMod val="75000"/>
+                      </a:schemeClr>
+                    </a:gs>
+                  </a:gsLst>
+                  <a:lin ang="5580000" scaled="0"/>
+                  <a:tileRect/>
+                </a:gradFill>
+                <a:effectLst>
+                  <a:glow rad="38100">
+                    <a:schemeClr val="bg1">
+                      <a:lumMod val="50000"/>
+                      <a:lumOff val="50000"/>
+                      <a:alpha val="20000"/>
+                    </a:schemeClr>
+                  </a:glow>
+                  <a:outerShdw blurRad="44450" dist="12700" dir="13860000" algn="tl" rotWithShape="0">
+                    <a:srgbClr val="000000">
+                      <a:alpha val="20000"/>
+                    </a:srgbClr>
+                  </a:outerShdw>
+                </a:effectLst>
+                <a:latin typeface="+mn-lt"/>
+                <a:ea typeface="+mn-ea"/>
+                <a:cs typeface="+mn-cs"/>
+              </a:defRPr>
+            </a:lvl3pPr>
+            <a:lvl4pPr marL="1543050" indent="-171450" algn="l" defTabSz="457200" rtl="0" eaLnBrk="1" latinLnBrk="0" hangingPunct="1">
+              <a:spcBef>
+                <a:spcPct val="20000"/>
+              </a:spcBef>
+              <a:spcAft>
+                <a:spcPts val="600"/>
+              </a:spcAft>
+              <a:buClr>
+                <a:schemeClr val="tx1"/>
+              </a:buClr>
+              <a:buSzPct val="100000"/>
+              <a:buFont typeface="Arial"/>
+              <a:buChar char="•"/>
+              <a:defRPr sz="1400" kern="1200" cap="small">
+                <a:gradFill flip="none" rotWithShape="1">
+                  <a:gsLst>
+                    <a:gs pos="0">
+                      <a:schemeClr val="tx1"/>
+                    </a:gs>
+                    <a:gs pos="100000">
+                      <a:schemeClr val="tx1">
+                        <a:lumMod val="75000"/>
+                      </a:schemeClr>
+                    </a:gs>
+                  </a:gsLst>
+                  <a:lin ang="5580000" scaled="0"/>
+                  <a:tileRect/>
+                </a:gradFill>
+                <a:effectLst>
+                  <a:glow rad="38100">
+                    <a:schemeClr val="bg1">
+                      <a:lumMod val="50000"/>
+                      <a:lumOff val="50000"/>
+                      <a:alpha val="20000"/>
+                    </a:schemeClr>
+                  </a:glow>
+                  <a:outerShdw blurRad="44450" dist="12700" dir="13860000" algn="tl" rotWithShape="0">
+                    <a:srgbClr val="000000">
+                      <a:alpha val="20000"/>
+                    </a:srgbClr>
+                  </a:outerShdw>
+                </a:effectLst>
+                <a:latin typeface="+mn-lt"/>
+                <a:ea typeface="+mn-ea"/>
+                <a:cs typeface="+mn-cs"/>
+              </a:defRPr>
+            </a:lvl4pPr>
+            <a:lvl5pPr marL="2000250" indent="-171450" algn="l" defTabSz="457200" rtl="0" eaLnBrk="1" latinLnBrk="0" hangingPunct="1">
+              <a:spcBef>
+                <a:spcPct val="20000"/>
+              </a:spcBef>
+              <a:spcAft>
+                <a:spcPts val="600"/>
+              </a:spcAft>
+              <a:buClr>
+                <a:schemeClr val="tx1"/>
+              </a:buClr>
+              <a:buSzPct val="100000"/>
+              <a:buFont typeface="Arial"/>
+              <a:buChar char="•"/>
+              <a:defRPr sz="1400" kern="1200" cap="small">
+                <a:gradFill flip="none" rotWithShape="1">
+                  <a:gsLst>
+                    <a:gs pos="0">
+                      <a:schemeClr val="tx1"/>
+                    </a:gs>
+                    <a:gs pos="100000">
+                      <a:schemeClr val="tx1">
+                        <a:lumMod val="75000"/>
+                      </a:schemeClr>
+                    </a:gs>
+                  </a:gsLst>
+                  <a:lin ang="5580000" scaled="0"/>
+                  <a:tileRect/>
+                </a:gradFill>
+                <a:effectLst>
+                  <a:glow rad="38100">
+                    <a:schemeClr val="bg1">
+                      <a:lumMod val="50000"/>
+                      <a:lumOff val="50000"/>
+                      <a:alpha val="20000"/>
+                    </a:schemeClr>
+                  </a:glow>
+                  <a:outerShdw blurRad="44450" dist="12700" dir="13860000" algn="tl" rotWithShape="0">
+                    <a:srgbClr val="000000">
+                      <a:alpha val="20000"/>
+                    </a:srgbClr>
+                  </a:outerShdw>
+                </a:effectLst>
+                <a:latin typeface="+mn-lt"/>
+                <a:ea typeface="+mn-ea"/>
+                <a:cs typeface="+mn-cs"/>
+              </a:defRPr>
+            </a:lvl5pPr>
+            <a:lvl6pPr marL="2514600" indent="-228600" algn="l" defTabSz="457200" rtl="0" eaLnBrk="1" latinLnBrk="0" hangingPunct="1">
+              <a:spcBef>
+                <a:spcPct val="20000"/>
+              </a:spcBef>
+              <a:spcAft>
+                <a:spcPts val="600"/>
+              </a:spcAft>
+              <a:buClr>
+                <a:schemeClr val="tx1"/>
+              </a:buClr>
+              <a:buSzPct val="100000"/>
+              <a:buFont typeface="Arial"/>
+              <a:buChar char="•"/>
+              <a:defRPr sz="1200" kern="1200" cap="small">
+                <a:gradFill flip="none" rotWithShape="1">
+                  <a:gsLst>
+                    <a:gs pos="0">
+                      <a:schemeClr val="tx1"/>
+                    </a:gs>
+                    <a:gs pos="100000">
+                      <a:schemeClr val="tx1">
+                        <a:lumMod val="75000"/>
+                      </a:schemeClr>
+                    </a:gs>
+                  </a:gsLst>
+                  <a:lin ang="5580000" scaled="0"/>
+                  <a:tileRect/>
+                </a:gradFill>
+                <a:effectLst>
+                  <a:glow rad="38100">
+                    <a:schemeClr val="bg1">
+                      <a:lumMod val="50000"/>
+                      <a:lumOff val="50000"/>
+                      <a:alpha val="20000"/>
+                    </a:schemeClr>
+                  </a:glow>
+                  <a:outerShdw blurRad="44450" dist="12700" dir="13860000" algn="tl" rotWithShape="0">
+                    <a:srgbClr val="000000">
+                      <a:alpha val="20000"/>
+                    </a:srgbClr>
+                  </a:outerShdw>
+                </a:effectLst>
+                <a:latin typeface="+mn-lt"/>
+                <a:ea typeface="+mn-ea"/>
+                <a:cs typeface="+mn-cs"/>
+              </a:defRPr>
+            </a:lvl6pPr>
+            <a:lvl7pPr marL="2971800" indent="-228600" algn="l" defTabSz="457200" rtl="0" eaLnBrk="1" latinLnBrk="0" hangingPunct="1">
+              <a:spcBef>
+                <a:spcPct val="20000"/>
+              </a:spcBef>
+              <a:spcAft>
+                <a:spcPts val="600"/>
+              </a:spcAft>
+              <a:buClr>
+                <a:schemeClr val="tx1"/>
+              </a:buClr>
+              <a:buSzPct val="100000"/>
+              <a:buFont typeface="Arial"/>
+              <a:buChar char="•"/>
+              <a:defRPr sz="1200" kern="1200" cap="small">
+                <a:gradFill flip="none" rotWithShape="1">
+                  <a:gsLst>
+                    <a:gs pos="0">
+                      <a:schemeClr val="tx1"/>
+                    </a:gs>
+                    <a:gs pos="100000">
+                      <a:schemeClr val="tx1">
+                        <a:lumMod val="75000"/>
+                      </a:schemeClr>
+                    </a:gs>
+                  </a:gsLst>
+                  <a:lin ang="5580000" scaled="0"/>
+                  <a:tileRect/>
+                </a:gradFill>
+                <a:effectLst>
+                  <a:glow rad="38100">
+                    <a:schemeClr val="bg1">
+                      <a:lumMod val="50000"/>
+                      <a:lumOff val="50000"/>
+                      <a:alpha val="20000"/>
+                    </a:schemeClr>
+                  </a:glow>
+                  <a:outerShdw blurRad="44450" dist="12700" dir="13860000" algn="tl" rotWithShape="0">
+                    <a:srgbClr val="000000">
+                      <a:alpha val="20000"/>
+                    </a:srgbClr>
+                  </a:outerShdw>
+                </a:effectLst>
+                <a:latin typeface="+mn-lt"/>
+                <a:ea typeface="+mn-ea"/>
+                <a:cs typeface="+mn-cs"/>
+              </a:defRPr>
+            </a:lvl7pPr>
+            <a:lvl8pPr marL="3429000" indent="-228600" algn="l" defTabSz="457200" rtl="0" eaLnBrk="1" latinLnBrk="0" hangingPunct="1">
+              <a:spcBef>
+                <a:spcPct val="20000"/>
+              </a:spcBef>
+              <a:spcAft>
+                <a:spcPts val="600"/>
+              </a:spcAft>
+              <a:buClr>
+                <a:schemeClr val="tx1"/>
+              </a:buClr>
+              <a:buSzPct val="100000"/>
+              <a:buFont typeface="Arial"/>
+              <a:buChar char="•"/>
+              <a:defRPr sz="1200" kern="1200" cap="small">
+                <a:gradFill flip="none" rotWithShape="1">
+                  <a:gsLst>
+                    <a:gs pos="0">
+                      <a:schemeClr val="tx1"/>
+                    </a:gs>
+                    <a:gs pos="100000">
+                      <a:schemeClr val="tx1">
+                        <a:lumMod val="75000"/>
+                      </a:schemeClr>
+                    </a:gs>
+                  </a:gsLst>
+                  <a:lin ang="5580000" scaled="0"/>
+                  <a:tileRect/>
+                </a:gradFill>
+                <a:effectLst>
+                  <a:glow rad="38100">
+                    <a:schemeClr val="bg1">
+                      <a:lumMod val="50000"/>
+                      <a:lumOff val="50000"/>
+                      <a:alpha val="20000"/>
+                    </a:schemeClr>
+                  </a:glow>
+                  <a:outerShdw blurRad="44450" dist="12700" dir="13860000" algn="tl" rotWithShape="0">
+                    <a:srgbClr val="000000">
+                      <a:alpha val="20000"/>
+                    </a:srgbClr>
+                  </a:outerShdw>
+                </a:effectLst>
+                <a:latin typeface="+mn-lt"/>
+                <a:ea typeface="+mn-ea"/>
+                <a:cs typeface="+mn-cs"/>
+              </a:defRPr>
+            </a:lvl8pPr>
+            <a:lvl9pPr marL="3886200" indent="-228600" algn="l" defTabSz="457200" rtl="0" eaLnBrk="1" latinLnBrk="0" hangingPunct="1">
+              <a:spcBef>
+                <a:spcPct val="20000"/>
+              </a:spcBef>
+              <a:spcAft>
+                <a:spcPts val="600"/>
+              </a:spcAft>
+              <a:buClr>
+                <a:schemeClr val="tx1"/>
+              </a:buClr>
+              <a:buSzPct val="100000"/>
+              <a:buFont typeface="Arial"/>
+              <a:buChar char="•"/>
+              <a:defRPr sz="1200" kern="1200" cap="small">
+                <a:gradFill flip="none" rotWithShape="1">
+                  <a:gsLst>
+                    <a:gs pos="0">
+                      <a:schemeClr val="tx1"/>
+                    </a:gs>
+                    <a:gs pos="100000">
+                      <a:schemeClr val="tx1">
+                        <a:lumMod val="75000"/>
+                      </a:schemeClr>
+                    </a:gs>
+                  </a:gsLst>
+                  <a:lin ang="5580000" scaled="0"/>
+                  <a:tileRect/>
+                </a:gradFill>
+                <a:effectLst>
+                  <a:glow rad="38100">
+                    <a:schemeClr val="bg1">
+                      <a:lumMod val="50000"/>
+                      <a:lumOff val="50000"/>
+                      <a:alpha val="20000"/>
+                    </a:schemeClr>
+                  </a:glow>
+                  <a:outerShdw blurRad="44450" dist="12700" dir="13860000" algn="tl" rotWithShape="0">
+                    <a:srgbClr val="000000">
+                      <a:alpha val="20000"/>
+                    </a:srgbClr>
+                  </a:outerShdw>
+                </a:effectLst>
+                <a:latin typeface="+mn-lt"/>
+                <a:ea typeface="+mn-ea"/>
+                <a:cs typeface="+mn-cs"/>
+              </a:defRPr>
+            </a:lvl9pPr>
+          </a:lstStyle>
+          <a:p>
+            <a:pPr marL="0" indent="0" algn="ctr">
+              <a:buFont typeface="Arial"/>
+              <a:buNone/>
+            </a:pPr>
+            <a:r>
+              <a:rPr lang="es-CO" sz="1600" b="1" cap="none" dirty="0">
+                <a:solidFill>
+                  <a:srgbClr val="ACA9A7"/>
+                </a:solidFill>
+                <a:effectLst/>
+              </a:rPr>
+              <a:t>Protocolos de seguridad</a:t>
+            </a:r>
+          </a:p>
+          <a:p>
+            <a:pPr marL="0" indent="0" algn="ctr">
+              <a:buFont typeface="Arial"/>
+              <a:buNone/>
+            </a:pPr>
+            <a:r>
+              <a:rPr lang="es-MX" sz="1400" b="1" cap="none" dirty="0">
+                <a:solidFill>
+                  <a:srgbClr val="797C75"/>
+                </a:solidFill>
+                <a:effectLst/>
+              </a:rPr>
+              <a:t>Para auditorías y cumplimiento legal.</a:t>
+            </a:r>
+            <a:endParaRPr lang="es-CO" sz="1200" cap="none" dirty="0">
+              <a:solidFill>
+                <a:srgbClr val="797C75"/>
+              </a:solidFill>
+              <a:effectLst/>
+            </a:endParaRPr>
+          </a:p>
+        </p:txBody>
+      </p:sp>
+    </p:spTree>
+    <p:extLst>
+      <p:ext uri="{BB962C8B-B14F-4D97-AF65-F5344CB8AC3E}">
+        <p14:creationId xmlns:p14="http://schemas.microsoft.com/office/powerpoint/2010/main" val="3553952267"/>
       </p:ext>
     </p:extLst>
   </p:cSld>
